--- a/OrgStructure.pptx
+++ b/OrgStructure.pptx
@@ -913,6 +913,256 @@
                 </a:solidFill>
               </a:rPr>
               <a:t>Руководитель: Глазунов Всеволод Игоревич</a:t>
+            </a:r>
+            <a:endParaRPr lang="en-US" sz="1200" dirty="0"/>
+          </a:p>
+        </p:txBody>
+      </p:sp>
+      <p:sp>
+        <p:nvSpPr>
+          <p:cNvPr id="3" name="Text 1"/>
+          <p:cNvSpPr/>
+          <p:nvPr/>
+        </p:nvSpPr>
+        <p:spPr>
+          <a:xfrm>
+            <a:off x="457200" y="1097280"/>
+            <a:ext cx="8229600" cy="457200"/>
+          </a:xfrm>
+          <a:prstGeom prst="rect">
+            <a:avLst/>
+          </a:prstGeom>
+          <a:noFill/>
+          <a:ln/>
+        </p:spPr>
+        <p:txBody>
+          <a:bodyPr wrap="square" rtlCol="0" anchor="ctr"/>
+          <a:lstStyle/>
+          <a:p>
+            <a:pPr indent="0" marL="0">
+              <a:buNone/>
+            </a:pPr>
+            <a:r>
+              <a:rPr lang="en-US" sz="1200" dirty="0">
+                <a:solidFill>
+                  <a:srgbClr val="000000"/>
+                </a:solidFill>
+              </a:rPr>
+              <a:t>Маркетинговая лаборатория (7 чел.)</a:t>
+            </a:r>
+            <a:endParaRPr lang="en-US" sz="1200" dirty="0"/>
+          </a:p>
+          <a:p>
+            <a:pPr indent="0" marL="0">
+              <a:buNone/>
+            </a:pPr>
+            <a:r>
+              <a:rPr lang="en-US" sz="1200" dirty="0">
+                <a:solidFill>
+                  <a:srgbClr val="000000"/>
+                </a:solidFill>
+              </a:rPr>
+              <a:t>Руководитель: Григорьева Наталья Андреевна</a:t>
+            </a:r>
+            <a:endParaRPr lang="en-US" sz="1200" dirty="0"/>
+          </a:p>
+        </p:txBody>
+      </p:sp>
+      <p:sp>
+        <p:nvSpPr>
+          <p:cNvPr id="4" name="Text 2"/>
+          <p:cNvSpPr/>
+          <p:nvPr/>
+        </p:nvSpPr>
+        <p:spPr>
+          <a:xfrm>
+            <a:off x="457200" y="1737360"/>
+            <a:ext cx="8229600" cy="457200"/>
+          </a:xfrm>
+          <a:prstGeom prst="rect">
+            <a:avLst/>
+          </a:prstGeom>
+          <a:noFill/>
+          <a:ln/>
+        </p:spPr>
+        <p:txBody>
+          <a:bodyPr wrap="square" rtlCol="0" anchor="ctr"/>
+          <a:lstStyle/>
+          <a:p>
+            <a:pPr indent="0" marL="0">
+              <a:buNone/>
+            </a:pPr>
+            <a:r>
+              <a:rPr lang="en-US" sz="1200" dirty="0">
+                <a:solidFill>
+                  <a:srgbClr val="000000"/>
+                </a:solidFill>
+              </a:rPr>
+              <a:t>Отдел аналитики (7 чел.)</a:t>
+            </a:r>
+            <a:endParaRPr lang="en-US" sz="1200" dirty="0"/>
+          </a:p>
+          <a:p>
+            <a:pPr indent="0" marL="0">
+              <a:buNone/>
+            </a:pPr>
+            <a:r>
+              <a:rPr lang="en-US" sz="1200" dirty="0">
+                <a:solidFill>
+                  <a:srgbClr val="000000"/>
+                </a:solidFill>
+              </a:rPr>
+              <a:t>Руководитель: Ильдарова София Игоревна</a:t>
+            </a:r>
+            <a:endParaRPr lang="en-US" sz="1200" dirty="0"/>
+          </a:p>
+        </p:txBody>
+      </p:sp>
+      <p:sp>
+        <p:nvSpPr>
+          <p:cNvPr id="5" name="Text 3"/>
+          <p:cNvSpPr/>
+          <p:nvPr/>
+        </p:nvSpPr>
+        <p:spPr>
+          <a:xfrm>
+            <a:off x="457200" y="2377440"/>
+            <a:ext cx="8229600" cy="457200"/>
+          </a:xfrm>
+          <a:prstGeom prst="rect">
+            <a:avLst/>
+          </a:prstGeom>
+          <a:noFill/>
+          <a:ln/>
+        </p:spPr>
+        <p:txBody>
+          <a:bodyPr wrap="square" rtlCol="0" anchor="ctr"/>
+          <a:lstStyle/>
+          <a:p>
+            <a:pPr indent="0" marL="0">
+              <a:buNone/>
+            </a:pPr>
+            <a:r>
+              <a:rPr lang="en-US" sz="1200" dirty="0">
+                <a:solidFill>
+                  <a:srgbClr val="000000"/>
+                </a:solidFill>
+              </a:rPr>
+              <a:t>Отдел аудита и стандартов (0 чел.)</a:t>
+            </a:r>
+            <a:endParaRPr lang="en-US" sz="1200" dirty="0"/>
+          </a:p>
+          <a:p>
+            <a:pPr indent="0" marL="0">
+              <a:buNone/>
+            </a:pPr>
+            <a:r>
+              <a:rPr lang="en-US" sz="1200" dirty="0">
+                <a:solidFill>
+                  <a:srgbClr val="000000"/>
+                </a:solidFill>
+              </a:rPr>
+              <a:t>Руководитель: Глазунов Всеволод Игоревич</a:t>
+            </a:r>
+            <a:endParaRPr lang="en-US" sz="1200" dirty="0"/>
+          </a:p>
+        </p:txBody>
+      </p:sp>
+      <p:sp>
+        <p:nvSpPr>
+          <p:cNvPr id="6" name="Text 4"/>
+          <p:cNvSpPr/>
+          <p:nvPr/>
+        </p:nvSpPr>
+        <p:spPr>
+          <a:xfrm>
+            <a:off x="457200" y="3017520"/>
+            <a:ext cx="8229600" cy="457200"/>
+          </a:xfrm>
+          <a:prstGeom prst="rect">
+            <a:avLst/>
+          </a:prstGeom>
+          <a:noFill/>
+          <a:ln/>
+        </p:spPr>
+        <p:txBody>
+          <a:bodyPr wrap="square" rtlCol="0" anchor="ctr"/>
+          <a:lstStyle/>
+          <a:p>
+            <a:pPr indent="0" marL="0">
+              <a:buNone/>
+            </a:pPr>
+            <a:r>
+              <a:rPr lang="en-US" sz="1200" dirty="0">
+                <a:solidFill>
+                  <a:srgbClr val="000000"/>
+                </a:solidFill>
+              </a:rPr>
+              <a:t>Отдел маркетинговой информации и обучения продукту (2 чел.)</a:t>
+            </a:r>
+            <a:endParaRPr lang="en-US" sz="1200" dirty="0"/>
+          </a:p>
+          <a:p>
+            <a:pPr indent="0" marL="0">
+              <a:buNone/>
+            </a:pPr>
+            <a:r>
+              <a:rPr lang="en-US" sz="1200" dirty="0">
+                <a:solidFill>
+                  <a:srgbClr val="000000"/>
+                </a:solidFill>
+              </a:rPr>
+              <a:t>Руководитель: Слободенюк Анна Юрьевна</a:t>
+            </a:r>
+            <a:endParaRPr lang="en-US" sz="1200" dirty="0"/>
+          </a:p>
+        </p:txBody>
+      </p:sp>
+      <p:sp>
+        <p:nvSpPr>
+          <p:cNvPr id="7" name="Text 5"/>
+          <p:cNvSpPr/>
+          <p:nvPr/>
+        </p:nvSpPr>
+        <p:spPr>
+          <a:xfrm>
+            <a:off x="457200" y="3657600"/>
+            <a:ext cx="8229600" cy="457200"/>
+          </a:xfrm>
+          <a:prstGeom prst="rect">
+            <a:avLst/>
+          </a:prstGeom>
+          <a:noFill/>
+          <a:ln/>
+        </p:spPr>
+        <p:txBody>
+          <a:bodyPr wrap="square" rtlCol="0" anchor="ctr"/>
+          <a:lstStyle/>
+          <a:p>
+            <a:pPr indent="0" marL="0">
+              <a:buNone/>
+            </a:pPr>
+            <a:r>
+              <a:rPr lang="en-US" sz="1200" dirty="0">
+                <a:solidFill>
+                  <a:srgbClr val="000000"/>
+                </a:solidFill>
+              </a:rPr>
+              <a:t>Служба цифрового маркетинга (2 чел.)</a:t>
+            </a:r>
+            <a:endParaRPr lang="en-US" sz="1200" dirty="0"/>
+          </a:p>
+          <a:p>
+            <a:pPr indent="0" marL="0">
+              <a:buNone/>
+            </a:pPr>
+            <a:r>
+              <a:rPr lang="en-US" sz="1200" dirty="0">
+                <a:solidFill>
+                  <a:srgbClr val="000000"/>
+                </a:solidFill>
+              </a:rPr>
+              <a:t>Руководитель: -</a:t>
             </a:r>
             <a:endParaRPr lang="en-US" sz="1200" dirty="0"/>
           </a:p>

--- a/OrgStructure.pptx
+++ b/OrgStructure.pptx
@@ -6,9 +6,13 @@
   </p:sldMasterIdLst>
   <p:sldIdLst>
     <p:sldId id="256" r:id="rId2"/>
+    <p:sldId id="257" r:id="rId3"/>
+    <p:sldId id="258" r:id="rId4"/>
+    <p:sldId id="259" r:id="rId5"/>
+    <p:sldId id="260" r:id="rId6"/>
   </p:sldIdLst>
   <p:notesMasterIdLst>
-    <p:notesMasterId r:id="rId3"/>
+    <p:notesMasterId r:id="rId7"/>
   </p:notesMasterIdLst>
   <p:sldSz cx="9144000" cy="5143500"/>
   <p:notesSz cx="5143500" cy="9144000"/>
@@ -526,6 +530,358 @@
             <a:fld id="{F7021451-1387-4CA6-816F-3879F97B5CBC}" type="slidenum">
               <a:rPr lang="en-US"/>
               <a:t>1</a:t>
+            </a:fld>
+            <a:endParaRPr lang="en-US"/>
+          </a:p>
+        </p:txBody>
+      </p:sp>
+    </p:spTree>
+    <p:extLst>
+      <p:ext uri="{BB962C8B-B14F-4D97-AF65-F5344CB8AC3E}">
+        <p14:creationId xmlns:p14="http://schemas.microsoft.com/office/powerpoint/2010/main" val="1024086991"/>
+      </p:ext>
+    </p:extLst>
+  </p:cSld>
+  <p:clrMapOvr>
+    <a:masterClrMapping/>
+  </p:clrMapOvr>
+</p:notes>
+</file>
+
+<file path=ppt/notesSlides/notesSlide2.xml><?xml version="1.0" encoding="utf-8"?>
+<p:notes xmlns:a="http://schemas.openxmlformats.org/drawingml/2006/main" xmlns:r="http://schemas.openxmlformats.org/officeDocument/2006/relationships" xmlns:p="http://schemas.openxmlformats.org/presentationml/2006/main">
+  <p:cSld>
+    <p:spTree>
+      <p:nvGrpSpPr>
+        <p:cNvPr id="1" name=""/>
+        <p:cNvGrpSpPr/>
+        <p:nvPr/>
+      </p:nvGrpSpPr>
+      <p:grpSpPr>
+        <a:xfrm>
+          <a:off x="0" y="0"/>
+          <a:ext cx="0" cy="0"/>
+          <a:chOff x="0" y="0"/>
+          <a:chExt cx="0" cy="0"/>
+        </a:xfrm>
+      </p:grpSpPr>
+      <p:sp>
+        <p:nvSpPr>
+          <p:cNvPr id="2" name="Slide Image Placeholder 1"/>
+          <p:cNvSpPr>
+            <a:spLocks noGrp="1" noRot="1" noChangeAspect="1"/>
+          </p:cNvSpPr>
+          <p:nvPr>
+            <p:ph type="sldImg"/>
+          </p:nvPr>
+        </p:nvSpPr>
+        <p:spPr/>
+      </p:sp>
+      <p:sp>
+        <p:nvSpPr>
+          <p:cNvPr id="3" name="Notes Placeholder 2"/>
+          <p:cNvSpPr>
+            <a:spLocks noGrp="1"/>
+          </p:cNvSpPr>
+          <p:nvPr>
+            <p:ph type="body" idx="1"/>
+          </p:nvPr>
+        </p:nvSpPr>
+        <p:spPr/>
+        <p:txBody>
+          <a:bodyPr/>
+          <a:lstStyle/>
+          <a:p>
+            <a:r>
+              <a:rPr lang="en-US" dirty="0"/>
+              <a:t/>
+            </a:r>
+            <a:endParaRPr lang="en-US" dirty="0"/>
+          </a:p>
+        </p:txBody>
+      </p:sp>
+      <p:sp>
+        <p:nvSpPr>
+          <p:cNvPr id="4" name="Slide Number Placeholder 3"/>
+          <p:cNvSpPr>
+            <a:spLocks noGrp="1"/>
+          </p:cNvSpPr>
+          <p:nvPr>
+            <p:ph type="sldNum" sz="quarter" idx="10"/>
+          </p:nvPr>
+        </p:nvSpPr>
+        <p:spPr/>
+        <p:txBody>
+          <a:bodyPr/>
+          <a:lstStyle/>
+          <a:p>
+            <a:fld id="{F7021451-1387-4CA6-816F-3879F97B5CBC}" type="slidenum">
+              <a:rPr lang="en-US"/>
+              <a:t>2</a:t>
+            </a:fld>
+            <a:endParaRPr lang="en-US"/>
+          </a:p>
+        </p:txBody>
+      </p:sp>
+    </p:spTree>
+    <p:extLst>
+      <p:ext uri="{BB962C8B-B14F-4D97-AF65-F5344CB8AC3E}">
+        <p14:creationId xmlns:p14="http://schemas.microsoft.com/office/powerpoint/2010/main" val="1024086991"/>
+      </p:ext>
+    </p:extLst>
+  </p:cSld>
+  <p:clrMapOvr>
+    <a:masterClrMapping/>
+  </p:clrMapOvr>
+</p:notes>
+</file>
+
+<file path=ppt/notesSlides/notesSlide3.xml><?xml version="1.0" encoding="utf-8"?>
+<p:notes xmlns:a="http://schemas.openxmlformats.org/drawingml/2006/main" xmlns:r="http://schemas.openxmlformats.org/officeDocument/2006/relationships" xmlns:p="http://schemas.openxmlformats.org/presentationml/2006/main">
+  <p:cSld>
+    <p:spTree>
+      <p:nvGrpSpPr>
+        <p:cNvPr id="1" name=""/>
+        <p:cNvGrpSpPr/>
+        <p:nvPr/>
+      </p:nvGrpSpPr>
+      <p:grpSpPr>
+        <a:xfrm>
+          <a:off x="0" y="0"/>
+          <a:ext cx="0" cy="0"/>
+          <a:chOff x="0" y="0"/>
+          <a:chExt cx="0" cy="0"/>
+        </a:xfrm>
+      </p:grpSpPr>
+      <p:sp>
+        <p:nvSpPr>
+          <p:cNvPr id="2" name="Slide Image Placeholder 1"/>
+          <p:cNvSpPr>
+            <a:spLocks noGrp="1" noRot="1" noChangeAspect="1"/>
+          </p:cNvSpPr>
+          <p:nvPr>
+            <p:ph type="sldImg"/>
+          </p:nvPr>
+        </p:nvSpPr>
+        <p:spPr/>
+      </p:sp>
+      <p:sp>
+        <p:nvSpPr>
+          <p:cNvPr id="3" name="Notes Placeholder 2"/>
+          <p:cNvSpPr>
+            <a:spLocks noGrp="1"/>
+          </p:cNvSpPr>
+          <p:nvPr>
+            <p:ph type="body" idx="1"/>
+          </p:nvPr>
+        </p:nvSpPr>
+        <p:spPr/>
+        <p:txBody>
+          <a:bodyPr/>
+          <a:lstStyle/>
+          <a:p>
+            <a:r>
+              <a:rPr lang="en-US" dirty="0"/>
+              <a:t/>
+            </a:r>
+            <a:endParaRPr lang="en-US" dirty="0"/>
+          </a:p>
+        </p:txBody>
+      </p:sp>
+      <p:sp>
+        <p:nvSpPr>
+          <p:cNvPr id="4" name="Slide Number Placeholder 3"/>
+          <p:cNvSpPr>
+            <a:spLocks noGrp="1"/>
+          </p:cNvSpPr>
+          <p:nvPr>
+            <p:ph type="sldNum" sz="quarter" idx="10"/>
+          </p:nvPr>
+        </p:nvSpPr>
+        <p:spPr/>
+        <p:txBody>
+          <a:bodyPr/>
+          <a:lstStyle/>
+          <a:p>
+            <a:fld id="{F7021451-1387-4CA6-816F-3879F97B5CBC}" type="slidenum">
+              <a:rPr lang="en-US"/>
+              <a:t>3</a:t>
+            </a:fld>
+            <a:endParaRPr lang="en-US"/>
+          </a:p>
+        </p:txBody>
+      </p:sp>
+    </p:spTree>
+    <p:extLst>
+      <p:ext uri="{BB962C8B-B14F-4D97-AF65-F5344CB8AC3E}">
+        <p14:creationId xmlns:p14="http://schemas.microsoft.com/office/powerpoint/2010/main" val="1024086991"/>
+      </p:ext>
+    </p:extLst>
+  </p:cSld>
+  <p:clrMapOvr>
+    <a:masterClrMapping/>
+  </p:clrMapOvr>
+</p:notes>
+</file>
+
+<file path=ppt/notesSlides/notesSlide4.xml><?xml version="1.0" encoding="utf-8"?>
+<p:notes xmlns:a="http://schemas.openxmlformats.org/drawingml/2006/main" xmlns:r="http://schemas.openxmlformats.org/officeDocument/2006/relationships" xmlns:p="http://schemas.openxmlformats.org/presentationml/2006/main">
+  <p:cSld>
+    <p:spTree>
+      <p:nvGrpSpPr>
+        <p:cNvPr id="1" name=""/>
+        <p:cNvGrpSpPr/>
+        <p:nvPr/>
+      </p:nvGrpSpPr>
+      <p:grpSpPr>
+        <a:xfrm>
+          <a:off x="0" y="0"/>
+          <a:ext cx="0" cy="0"/>
+          <a:chOff x="0" y="0"/>
+          <a:chExt cx="0" cy="0"/>
+        </a:xfrm>
+      </p:grpSpPr>
+      <p:sp>
+        <p:nvSpPr>
+          <p:cNvPr id="2" name="Slide Image Placeholder 1"/>
+          <p:cNvSpPr>
+            <a:spLocks noGrp="1" noRot="1" noChangeAspect="1"/>
+          </p:cNvSpPr>
+          <p:nvPr>
+            <p:ph type="sldImg"/>
+          </p:nvPr>
+        </p:nvSpPr>
+        <p:spPr/>
+      </p:sp>
+      <p:sp>
+        <p:nvSpPr>
+          <p:cNvPr id="3" name="Notes Placeholder 2"/>
+          <p:cNvSpPr>
+            <a:spLocks noGrp="1"/>
+          </p:cNvSpPr>
+          <p:nvPr>
+            <p:ph type="body" idx="1"/>
+          </p:nvPr>
+        </p:nvSpPr>
+        <p:spPr/>
+        <p:txBody>
+          <a:bodyPr/>
+          <a:lstStyle/>
+          <a:p>
+            <a:r>
+              <a:rPr lang="en-US" dirty="0"/>
+              <a:t/>
+            </a:r>
+            <a:endParaRPr lang="en-US" dirty="0"/>
+          </a:p>
+        </p:txBody>
+      </p:sp>
+      <p:sp>
+        <p:nvSpPr>
+          <p:cNvPr id="4" name="Slide Number Placeholder 3"/>
+          <p:cNvSpPr>
+            <a:spLocks noGrp="1"/>
+          </p:cNvSpPr>
+          <p:nvPr>
+            <p:ph type="sldNum" sz="quarter" idx="10"/>
+          </p:nvPr>
+        </p:nvSpPr>
+        <p:spPr/>
+        <p:txBody>
+          <a:bodyPr/>
+          <a:lstStyle/>
+          <a:p>
+            <a:fld id="{F7021451-1387-4CA6-816F-3879F97B5CBC}" type="slidenum">
+              <a:rPr lang="en-US"/>
+              <a:t>4</a:t>
+            </a:fld>
+            <a:endParaRPr lang="en-US"/>
+          </a:p>
+        </p:txBody>
+      </p:sp>
+    </p:spTree>
+    <p:extLst>
+      <p:ext uri="{BB962C8B-B14F-4D97-AF65-F5344CB8AC3E}">
+        <p14:creationId xmlns:p14="http://schemas.microsoft.com/office/powerpoint/2010/main" val="1024086991"/>
+      </p:ext>
+    </p:extLst>
+  </p:cSld>
+  <p:clrMapOvr>
+    <a:masterClrMapping/>
+  </p:clrMapOvr>
+</p:notes>
+</file>
+
+<file path=ppt/notesSlides/notesSlide5.xml><?xml version="1.0" encoding="utf-8"?>
+<p:notes xmlns:a="http://schemas.openxmlformats.org/drawingml/2006/main" xmlns:r="http://schemas.openxmlformats.org/officeDocument/2006/relationships" xmlns:p="http://schemas.openxmlformats.org/presentationml/2006/main">
+  <p:cSld>
+    <p:spTree>
+      <p:nvGrpSpPr>
+        <p:cNvPr id="1" name=""/>
+        <p:cNvGrpSpPr/>
+        <p:nvPr/>
+      </p:nvGrpSpPr>
+      <p:grpSpPr>
+        <a:xfrm>
+          <a:off x="0" y="0"/>
+          <a:ext cx="0" cy="0"/>
+          <a:chOff x="0" y="0"/>
+          <a:chExt cx="0" cy="0"/>
+        </a:xfrm>
+      </p:grpSpPr>
+      <p:sp>
+        <p:nvSpPr>
+          <p:cNvPr id="2" name="Slide Image Placeholder 1"/>
+          <p:cNvSpPr>
+            <a:spLocks noGrp="1" noRot="1" noChangeAspect="1"/>
+          </p:cNvSpPr>
+          <p:nvPr>
+            <p:ph type="sldImg"/>
+          </p:nvPr>
+        </p:nvSpPr>
+        <p:spPr/>
+      </p:sp>
+      <p:sp>
+        <p:nvSpPr>
+          <p:cNvPr id="3" name="Notes Placeholder 2"/>
+          <p:cNvSpPr>
+            <a:spLocks noGrp="1"/>
+          </p:cNvSpPr>
+          <p:nvPr>
+            <p:ph type="body" idx="1"/>
+          </p:nvPr>
+        </p:nvSpPr>
+        <p:spPr/>
+        <p:txBody>
+          <a:bodyPr/>
+          <a:lstStyle/>
+          <a:p>
+            <a:r>
+              <a:rPr lang="en-US" dirty="0"/>
+              <a:t/>
+            </a:r>
+            <a:endParaRPr lang="en-US" dirty="0"/>
+          </a:p>
+        </p:txBody>
+      </p:sp>
+      <p:sp>
+        <p:nvSpPr>
+          <p:cNvPr id="4" name="Slide Number Placeholder 3"/>
+          <p:cNvSpPr>
+            <a:spLocks noGrp="1"/>
+          </p:cNvSpPr>
+          <p:nvPr>
+            <p:ph type="sldNum" sz="quarter" idx="10"/>
+          </p:nvPr>
+        </p:nvSpPr>
+        <p:spPr/>
+        <p:txBody>
+          <a:bodyPr/>
+          <a:lstStyle/>
+          <a:p>
+            <a:fld id="{F7021451-1387-4CA6-816F-3879F97B5CBC}" type="slidenum">
+              <a:rPr lang="en-US"/>
+              <a:t>5</a:t>
             </a:fld>
             <a:endParaRPr lang="en-US"/>
           </a:p>
@@ -877,7 +1233,7 @@
         <p:spPr>
           <a:xfrm>
             <a:off x="457200" y="457200"/>
-            <a:ext cx="8229600" cy="457200"/>
+            <a:ext cx="6858000" cy="0"/>
           </a:xfrm>
           <a:prstGeom prst="rect">
             <a:avLst/>
@@ -893,28 +1249,14 @@
               <a:buNone/>
             </a:pPr>
             <a:r>
-              <a:rPr lang="en-US" sz="1200" dirty="0">
+              <a:rPr lang="en-US" sz="1800" b="1" dirty="0">
                 <a:solidFill>
                   <a:srgbClr val="000000"/>
                 </a:solidFill>
               </a:rPr>
-              <a:t>Дирекция по маркетингу (21 чел.)</a:t>
-            </a:r>
-            <a:endParaRPr lang="en-US" sz="1200" dirty="0"/>
-          </a:p>
-          <a:p>
-            <a:pPr indent="0" marL="0">
-              <a:buNone/>
-            </a:pPr>
-            <a:r>
-              <a:rPr lang="en-US" sz="1200" dirty="0">
-                <a:solidFill>
-                  <a:srgbClr val="000000"/>
-                </a:solidFill>
-              </a:rPr>
-              <a:t>Руководитель: Глазунов Всеволод Игоревич</a:t>
-            </a:r>
-            <a:endParaRPr lang="en-US" sz="1200" dirty="0"/>
+              <a:t>Дирекция по персоналу (26)</a:t>
+            </a:r>
+            <a:endParaRPr lang="en-US" sz="1800" dirty="0"/>
           </a:p>
         </p:txBody>
       </p:sp>
@@ -926,8 +1268,8 @@
         </p:nvSpPr>
         <p:spPr>
           <a:xfrm>
-            <a:off x="457200" y="1097280"/>
-            <a:ext cx="8229600" cy="457200"/>
+            <a:off x="457200" y="914400"/>
+            <a:ext cx="6858000" cy="0"/>
           </a:xfrm>
           <a:prstGeom prst="rect">
             <a:avLst/>
@@ -943,28 +1285,14 @@
               <a:buNone/>
             </a:pPr>
             <a:r>
-              <a:rPr lang="en-US" sz="1200" dirty="0">
+              <a:rPr lang="en-US" sz="1400" dirty="0">
                 <a:solidFill>
                   <a:srgbClr val="000000"/>
                 </a:solidFill>
               </a:rPr>
-              <a:t>Маркетинговая лаборатория (7 чел.)</a:t>
-            </a:r>
-            <a:endParaRPr lang="en-US" sz="1200" dirty="0"/>
-          </a:p>
-          <a:p>
-            <a:pPr indent="0" marL="0">
-              <a:buNone/>
-            </a:pPr>
-            <a:r>
-              <a:rPr lang="en-US" sz="1200" dirty="0">
-                <a:solidFill>
-                  <a:srgbClr val="000000"/>
-                </a:solidFill>
-              </a:rPr>
-              <a:t>Руководитель: Григорьева Наталья Андреевна</a:t>
-            </a:r>
-            <a:endParaRPr lang="en-US" sz="1200" dirty="0"/>
+              <a:t>Руководитель: Невзорова Екатерина Викторовна</a:t>
+            </a:r>
+            <a:endParaRPr lang="en-US" sz="1400" dirty="0"/>
           </a:p>
         </p:txBody>
       </p:sp>
@@ -976,8 +1304,8 @@
         </p:nvSpPr>
         <p:spPr>
           <a:xfrm>
-            <a:off x="457200" y="1737360"/>
-            <a:ext cx="8229600" cy="457200"/>
+            <a:off x="457200" y="1371600"/>
+            <a:ext cx="6858000" cy="0"/>
           </a:xfrm>
           <a:prstGeom prst="rect">
             <a:avLst/>
@@ -998,36 +1326,47 @@
                   <a:srgbClr val="000000"/>
                 </a:solidFill>
               </a:rPr>
-              <a:t>Отдел аналитики (7 чел.)</a:t>
+              <a:t>Должности: HR бизнес-партнёр, Административный ассистент, Директор по персоналу, Заместитель Генерального директора - Директор по персоналу, Менеджер по внутрикорпоративным коммуникациям, Руководитель направления охраны труда</a:t>
             </a:r>
             <a:endParaRPr lang="en-US" sz="1200" dirty="0"/>
           </a:p>
-          <a:p>
-            <a:pPr indent="0" marL="0">
-              <a:buNone/>
-            </a:pPr>
-            <a:r>
-              <a:rPr lang="en-US" sz="1200" dirty="0">
-                <a:solidFill>
-                  <a:srgbClr val="000000"/>
-                </a:solidFill>
-              </a:rPr>
-              <a:t>Руководитель: Ильдарова София Игоревна</a:t>
-            </a:r>
-            <a:endParaRPr lang="en-US" sz="1200" dirty="0"/>
-          </a:p>
-        </p:txBody>
-      </p:sp>
-      <p:sp>
-        <p:nvSpPr>
-          <p:cNvPr id="5" name="Text 3"/>
+        </p:txBody>
+      </p:sp>
+    </p:spTree>
+  </p:cSld>
+  <p:clrMapOvr>
+    <a:masterClrMapping/>
+  </p:clrMapOvr>
+</p:sld>
+</file>
+
+<file path=ppt/slides/slide2.xml><?xml version="1.0" encoding="utf-8"?>
+<p:sld xmlns:a="http://schemas.openxmlformats.org/drawingml/2006/main" xmlns:r="http://schemas.openxmlformats.org/officeDocument/2006/relationships" xmlns:p="http://schemas.openxmlformats.org/presentationml/2006/main">
+  <p:cSld name="Slide 2">
+    <p:spTree>
+      <p:nvGrpSpPr>
+        <p:cNvPr id="1" name=""/>
+        <p:cNvGrpSpPr/>
+        <p:nvPr/>
+      </p:nvGrpSpPr>
+      <p:grpSpPr>
+        <a:xfrm>
+          <a:off x="0" y="0"/>
+          <a:ext cx="0" cy="0"/>
+          <a:chOff x="0" y="0"/>
+          <a:chExt cx="0" cy="0"/>
+        </a:xfrm>
+      </p:grpSpPr>
+      <p:sp>
+        <p:nvSpPr>
+          <p:cNvPr id="2" name="Text 0"/>
           <p:cNvSpPr/>
           <p:nvPr/>
         </p:nvSpPr>
         <p:spPr>
           <a:xfrm>
-            <a:off x="457200" y="2377440"/>
-            <a:ext cx="8229600" cy="457200"/>
+            <a:off x="457200" y="457200"/>
+            <a:ext cx="6858000" cy="0"/>
           </a:xfrm>
           <a:prstGeom prst="rect">
             <a:avLst/>
@@ -1043,41 +1382,27 @@
               <a:buNone/>
             </a:pPr>
             <a:r>
-              <a:rPr lang="en-US" sz="1200" dirty="0">
+              <a:rPr lang="en-US" sz="1800" b="1" dirty="0">
                 <a:solidFill>
                   <a:srgbClr val="000000"/>
                 </a:solidFill>
               </a:rPr>
-              <a:t>Отдел аудита и стандартов (0 чел.)</a:t>
-            </a:r>
-            <a:endParaRPr lang="en-US" sz="1200" dirty="0"/>
-          </a:p>
-          <a:p>
-            <a:pPr indent="0" marL="0">
-              <a:buNone/>
-            </a:pPr>
-            <a:r>
-              <a:rPr lang="en-US" sz="1200" dirty="0">
-                <a:solidFill>
-                  <a:srgbClr val="000000"/>
-                </a:solidFill>
-              </a:rPr>
-              <a:t>Руководитель: Глазунов Всеволод Игоревич</a:t>
-            </a:r>
-            <a:endParaRPr lang="en-US" sz="1200" dirty="0"/>
-          </a:p>
-        </p:txBody>
-      </p:sp>
-      <p:sp>
-        <p:nvSpPr>
-          <p:cNvPr id="6" name="Text 4"/>
+              <a:t>Отдел кадрового сопровождения производственного персонала (5)</a:t>
+            </a:r>
+            <a:endParaRPr lang="en-US" sz="1800" dirty="0"/>
+          </a:p>
+        </p:txBody>
+      </p:sp>
+      <p:sp>
+        <p:nvSpPr>
+          <p:cNvPr id="3" name="Text 1"/>
           <p:cNvSpPr/>
           <p:nvPr/>
         </p:nvSpPr>
         <p:spPr>
           <a:xfrm>
-            <a:off x="457200" y="3017520"/>
-            <a:ext cx="8229600" cy="457200"/>
+            <a:off x="457200" y="914400"/>
+            <a:ext cx="6858000" cy="0"/>
           </a:xfrm>
           <a:prstGeom prst="rect">
             <a:avLst/>
@@ -1093,41 +1418,27 @@
               <a:buNone/>
             </a:pPr>
             <a:r>
-              <a:rPr lang="en-US" sz="1200" dirty="0">
+              <a:rPr lang="en-US" sz="1400" dirty="0">
                 <a:solidFill>
                   <a:srgbClr val="000000"/>
                 </a:solidFill>
               </a:rPr>
-              <a:t>Отдел маркетинговой информации и обучения продукту (2 чел.)</a:t>
-            </a:r>
-            <a:endParaRPr lang="en-US" sz="1200" dirty="0"/>
-          </a:p>
-          <a:p>
-            <a:pPr indent="0" marL="0">
-              <a:buNone/>
-            </a:pPr>
-            <a:r>
-              <a:rPr lang="en-US" sz="1200" dirty="0">
-                <a:solidFill>
-                  <a:srgbClr val="000000"/>
-                </a:solidFill>
-              </a:rPr>
-              <a:t>Руководитель: Слободенюк Анна Юрьевна</a:t>
-            </a:r>
-            <a:endParaRPr lang="en-US" sz="1200" dirty="0"/>
-          </a:p>
-        </p:txBody>
-      </p:sp>
-      <p:sp>
-        <p:nvSpPr>
-          <p:cNvPr id="7" name="Text 5"/>
+              <a:t>Руководитель: Зелик Марина Сергеевна</a:t>
+            </a:r>
+            <a:endParaRPr lang="en-US" sz="1400" dirty="0"/>
+          </a:p>
+        </p:txBody>
+      </p:sp>
+      <p:sp>
+        <p:nvSpPr>
+          <p:cNvPr id="4" name="Text 2"/>
           <p:cNvSpPr/>
           <p:nvPr/>
         </p:nvSpPr>
         <p:spPr>
           <a:xfrm>
-            <a:off x="457200" y="3657600"/>
-            <a:ext cx="8229600" cy="457200"/>
+            <a:off x="457200" y="1371600"/>
+            <a:ext cx="6858000" cy="0"/>
           </a:xfrm>
           <a:prstGeom prst="rect">
             <a:avLst/>
@@ -1148,10 +1459,129 @@
                   <a:srgbClr val="000000"/>
                 </a:solidFill>
               </a:rPr>
-              <a:t>Служба цифрового маркетинга (2 чел.)</a:t>
+              <a:t>Должности: Ведущий специалист, Ведущий специалист по кадровому администрированию, Руководитель отдела, Специалист по кадровому администрированию, Специалист по привлечению персонала</a:t>
             </a:r>
             <a:endParaRPr lang="en-US" sz="1200" dirty="0"/>
           </a:p>
+        </p:txBody>
+      </p:sp>
+    </p:spTree>
+  </p:cSld>
+  <p:clrMapOvr>
+    <a:masterClrMapping/>
+  </p:clrMapOvr>
+</p:sld>
+</file>
+
+<file path=ppt/slides/slide3.xml><?xml version="1.0" encoding="utf-8"?>
+<p:sld xmlns:a="http://schemas.openxmlformats.org/drawingml/2006/main" xmlns:r="http://schemas.openxmlformats.org/officeDocument/2006/relationships" xmlns:p="http://schemas.openxmlformats.org/presentationml/2006/main">
+  <p:cSld name="Slide 3">
+    <p:spTree>
+      <p:nvGrpSpPr>
+        <p:cNvPr id="1" name=""/>
+        <p:cNvGrpSpPr/>
+        <p:nvPr/>
+      </p:nvGrpSpPr>
+      <p:grpSpPr>
+        <a:xfrm>
+          <a:off x="0" y="0"/>
+          <a:ext cx="0" cy="0"/>
+          <a:chOff x="0" y="0"/>
+          <a:chExt cx="0" cy="0"/>
+        </a:xfrm>
+      </p:grpSpPr>
+      <p:sp>
+        <p:nvSpPr>
+          <p:cNvPr id="2" name="Text 0"/>
+          <p:cNvSpPr/>
+          <p:nvPr/>
+        </p:nvSpPr>
+        <p:spPr>
+          <a:xfrm>
+            <a:off x="457200" y="457200"/>
+            <a:ext cx="6858000" cy="0"/>
+          </a:xfrm>
+          <a:prstGeom prst="rect">
+            <a:avLst/>
+          </a:prstGeom>
+          <a:noFill/>
+          <a:ln/>
+        </p:spPr>
+        <p:txBody>
+          <a:bodyPr wrap="square" rtlCol="0" anchor="ctr"/>
+          <a:lstStyle/>
+          <a:p>
+            <a:pPr indent="0" marL="0">
+              <a:buNone/>
+            </a:pPr>
+            <a:r>
+              <a:rPr lang="en-US" sz="1800" b="1" dirty="0">
+                <a:solidFill>
+                  <a:srgbClr val="000000"/>
+                </a:solidFill>
+              </a:rPr>
+              <a:t>Отдел кадровой экспертизы (5)</a:t>
+            </a:r>
+            <a:endParaRPr lang="en-US" sz="1800" dirty="0"/>
+          </a:p>
+        </p:txBody>
+      </p:sp>
+      <p:sp>
+        <p:nvSpPr>
+          <p:cNvPr id="3" name="Text 1"/>
+          <p:cNvSpPr/>
+          <p:nvPr/>
+        </p:nvSpPr>
+        <p:spPr>
+          <a:xfrm>
+            <a:off x="457200" y="914400"/>
+            <a:ext cx="6858000" cy="0"/>
+          </a:xfrm>
+          <a:prstGeom prst="rect">
+            <a:avLst/>
+          </a:prstGeom>
+          <a:noFill/>
+          <a:ln/>
+        </p:spPr>
+        <p:txBody>
+          <a:bodyPr wrap="square" rtlCol="0" anchor="ctr"/>
+          <a:lstStyle/>
+          <a:p>
+            <a:pPr indent="0" marL="0">
+              <a:buNone/>
+            </a:pPr>
+            <a:r>
+              <a:rPr lang="en-US" sz="1400" dirty="0">
+                <a:solidFill>
+                  <a:srgbClr val="000000"/>
+                </a:solidFill>
+              </a:rPr>
+              <a:t>Руководитель: Сеничева Надежда Алексеевна</a:t>
+            </a:r>
+            <a:endParaRPr lang="en-US" sz="1400" dirty="0"/>
+          </a:p>
+        </p:txBody>
+      </p:sp>
+      <p:sp>
+        <p:nvSpPr>
+          <p:cNvPr id="4" name="Text 2"/>
+          <p:cNvSpPr/>
+          <p:nvPr/>
+        </p:nvSpPr>
+        <p:spPr>
+          <a:xfrm>
+            <a:off x="457200" y="1371600"/>
+            <a:ext cx="6858000" cy="0"/>
+          </a:xfrm>
+          <a:prstGeom prst="rect">
+            <a:avLst/>
+          </a:prstGeom>
+          <a:noFill/>
+          <a:ln/>
+        </p:spPr>
+        <p:txBody>
+          <a:bodyPr wrap="square" rtlCol="0" anchor="ctr"/>
+          <a:lstStyle/>
           <a:p>
             <a:pPr indent="0" marL="0">
               <a:buNone/>
@@ -1162,7 +1592,273 @@
                   <a:srgbClr val="000000"/>
                 </a:solidFill>
               </a:rPr>
-              <a:t>Руководитель: -</a:t>
+              <a:t>Должности: Ведущий специалист, Руководитель отдела, Специалист</a:t>
+            </a:r>
+            <a:endParaRPr lang="en-US" sz="1200" dirty="0"/>
+          </a:p>
+        </p:txBody>
+      </p:sp>
+    </p:spTree>
+  </p:cSld>
+  <p:clrMapOvr>
+    <a:masterClrMapping/>
+  </p:clrMapOvr>
+</p:sld>
+</file>
+
+<file path=ppt/slides/slide4.xml><?xml version="1.0" encoding="utf-8"?>
+<p:sld xmlns:a="http://schemas.openxmlformats.org/drawingml/2006/main" xmlns:r="http://schemas.openxmlformats.org/officeDocument/2006/relationships" xmlns:p="http://schemas.openxmlformats.org/presentationml/2006/main">
+  <p:cSld name="Slide 4">
+    <p:spTree>
+      <p:nvGrpSpPr>
+        <p:cNvPr id="1" name=""/>
+        <p:cNvGrpSpPr/>
+        <p:nvPr/>
+      </p:nvGrpSpPr>
+      <p:grpSpPr>
+        <a:xfrm>
+          <a:off x="0" y="0"/>
+          <a:ext cx="0" cy="0"/>
+          <a:chOff x="0" y="0"/>
+          <a:chExt cx="0" cy="0"/>
+        </a:xfrm>
+      </p:grpSpPr>
+      <p:sp>
+        <p:nvSpPr>
+          <p:cNvPr id="2" name="Text 0"/>
+          <p:cNvSpPr/>
+          <p:nvPr/>
+        </p:nvSpPr>
+        <p:spPr>
+          <a:xfrm>
+            <a:off x="457200" y="457200"/>
+            <a:ext cx="6858000" cy="0"/>
+          </a:xfrm>
+          <a:prstGeom prst="rect">
+            <a:avLst/>
+          </a:prstGeom>
+          <a:noFill/>
+          <a:ln/>
+        </p:spPr>
+        <p:txBody>
+          <a:bodyPr wrap="square" rtlCol="0" anchor="ctr"/>
+          <a:lstStyle/>
+          <a:p>
+            <a:pPr indent="0" marL="0">
+              <a:buNone/>
+            </a:pPr>
+            <a:r>
+              <a:rPr lang="en-US" sz="1800" b="1" dirty="0">
+                <a:solidFill>
+                  <a:srgbClr val="000000"/>
+                </a:solidFill>
+              </a:rPr>
+              <a:t>Отдел компенсаций и льгот (4)</a:t>
+            </a:r>
+            <a:endParaRPr lang="en-US" sz="1800" dirty="0"/>
+          </a:p>
+        </p:txBody>
+      </p:sp>
+      <p:sp>
+        <p:nvSpPr>
+          <p:cNvPr id="3" name="Text 1"/>
+          <p:cNvSpPr/>
+          <p:nvPr/>
+        </p:nvSpPr>
+        <p:spPr>
+          <a:xfrm>
+            <a:off x="457200" y="914400"/>
+            <a:ext cx="6858000" cy="0"/>
+          </a:xfrm>
+          <a:prstGeom prst="rect">
+            <a:avLst/>
+          </a:prstGeom>
+          <a:noFill/>
+          <a:ln/>
+        </p:spPr>
+        <p:txBody>
+          <a:bodyPr wrap="square" rtlCol="0" anchor="ctr"/>
+          <a:lstStyle/>
+          <a:p>
+            <a:pPr indent="0" marL="0">
+              <a:buNone/>
+            </a:pPr>
+            <a:r>
+              <a:rPr lang="en-US" sz="1400" dirty="0">
+                <a:solidFill>
+                  <a:srgbClr val="000000"/>
+                </a:solidFill>
+              </a:rPr>
+              <a:t>Руководитель: Захарова Екатерина Геннадьевна</a:t>
+            </a:r>
+            <a:endParaRPr lang="en-US" sz="1400" dirty="0"/>
+          </a:p>
+        </p:txBody>
+      </p:sp>
+      <p:sp>
+        <p:nvSpPr>
+          <p:cNvPr id="4" name="Text 2"/>
+          <p:cNvSpPr/>
+          <p:nvPr/>
+        </p:nvSpPr>
+        <p:spPr>
+          <a:xfrm>
+            <a:off x="457200" y="1371600"/>
+            <a:ext cx="6858000" cy="0"/>
+          </a:xfrm>
+          <a:prstGeom prst="rect">
+            <a:avLst/>
+          </a:prstGeom>
+          <a:noFill/>
+          <a:ln/>
+        </p:spPr>
+        <p:txBody>
+          <a:bodyPr wrap="square" rtlCol="0" anchor="ctr"/>
+          <a:lstStyle/>
+          <a:p>
+            <a:pPr indent="0" marL="0">
+              <a:buNone/>
+            </a:pPr>
+            <a:r>
+              <a:rPr lang="en-US" sz="1200" dirty="0">
+                <a:solidFill>
+                  <a:srgbClr val="000000"/>
+                </a:solidFill>
+              </a:rPr>
+              <a:t>Должности: Главный специалист, Руководитель отдела, Специалист, Специалист по труду и заработной плате</a:t>
+            </a:r>
+            <a:endParaRPr lang="en-US" sz="1200" dirty="0"/>
+          </a:p>
+        </p:txBody>
+      </p:sp>
+    </p:spTree>
+  </p:cSld>
+  <p:clrMapOvr>
+    <a:masterClrMapping/>
+  </p:clrMapOvr>
+</p:sld>
+</file>
+
+<file path=ppt/slides/slide5.xml><?xml version="1.0" encoding="utf-8"?>
+<p:sld xmlns:a="http://schemas.openxmlformats.org/drawingml/2006/main" xmlns:r="http://schemas.openxmlformats.org/officeDocument/2006/relationships" xmlns:p="http://schemas.openxmlformats.org/presentationml/2006/main">
+  <p:cSld name="Slide 5">
+    <p:spTree>
+      <p:nvGrpSpPr>
+        <p:cNvPr id="1" name=""/>
+        <p:cNvGrpSpPr/>
+        <p:nvPr/>
+      </p:nvGrpSpPr>
+      <p:grpSpPr>
+        <a:xfrm>
+          <a:off x="0" y="0"/>
+          <a:ext cx="0" cy="0"/>
+          <a:chOff x="0" y="0"/>
+          <a:chExt cx="0" cy="0"/>
+        </a:xfrm>
+      </p:grpSpPr>
+      <p:sp>
+        <p:nvSpPr>
+          <p:cNvPr id="2" name="Text 0"/>
+          <p:cNvSpPr/>
+          <p:nvPr/>
+        </p:nvSpPr>
+        <p:spPr>
+          <a:xfrm>
+            <a:off x="457200" y="457200"/>
+            <a:ext cx="6858000" cy="0"/>
+          </a:xfrm>
+          <a:prstGeom prst="rect">
+            <a:avLst/>
+          </a:prstGeom>
+          <a:noFill/>
+          <a:ln/>
+        </p:spPr>
+        <p:txBody>
+          <a:bodyPr wrap="square" rtlCol="0" anchor="ctr"/>
+          <a:lstStyle/>
+          <a:p>
+            <a:pPr indent="0" marL="0">
+              <a:buNone/>
+            </a:pPr>
+            <a:r>
+              <a:rPr lang="en-US" sz="1800" b="1" dirty="0">
+                <a:solidFill>
+                  <a:srgbClr val="000000"/>
+                </a:solidFill>
+              </a:rPr>
+              <a:t>Отдел привлечения и развития (7)</a:t>
+            </a:r>
+            <a:endParaRPr lang="en-US" sz="1800" dirty="0"/>
+          </a:p>
+        </p:txBody>
+      </p:sp>
+      <p:sp>
+        <p:nvSpPr>
+          <p:cNvPr id="3" name="Text 1"/>
+          <p:cNvSpPr/>
+          <p:nvPr/>
+        </p:nvSpPr>
+        <p:spPr>
+          <a:xfrm>
+            <a:off x="457200" y="914400"/>
+            <a:ext cx="6858000" cy="0"/>
+          </a:xfrm>
+          <a:prstGeom prst="rect">
+            <a:avLst/>
+          </a:prstGeom>
+          <a:noFill/>
+          <a:ln/>
+        </p:spPr>
+        <p:txBody>
+          <a:bodyPr wrap="square" rtlCol="0" anchor="ctr"/>
+          <a:lstStyle/>
+          <a:p>
+            <a:pPr indent="0" marL="0">
+              <a:buNone/>
+            </a:pPr>
+            <a:r>
+              <a:rPr lang="en-US" sz="1400" dirty="0">
+                <a:solidFill>
+                  <a:srgbClr val="000000"/>
+                </a:solidFill>
+              </a:rPr>
+              <a:t>Руководитель: Васенина Мария Анатольевна</a:t>
+            </a:r>
+            <a:endParaRPr lang="en-US" sz="1400" dirty="0"/>
+          </a:p>
+        </p:txBody>
+      </p:sp>
+      <p:sp>
+        <p:nvSpPr>
+          <p:cNvPr id="4" name="Text 2"/>
+          <p:cNvSpPr/>
+          <p:nvPr/>
+        </p:nvSpPr>
+        <p:spPr>
+          <a:xfrm>
+            <a:off x="457200" y="1371600"/>
+            <a:ext cx="6858000" cy="0"/>
+          </a:xfrm>
+          <a:prstGeom prst="rect">
+            <a:avLst/>
+          </a:prstGeom>
+          <a:noFill/>
+          <a:ln/>
+        </p:spPr>
+        <p:txBody>
+          <a:bodyPr wrap="square" rtlCol="0" anchor="ctr"/>
+          <a:lstStyle/>
+          <a:p>
+            <a:pPr indent="0" marL="0">
+              <a:buNone/>
+            </a:pPr>
+            <a:r>
+              <a:rPr lang="en-US" sz="1200" dirty="0">
+                <a:solidFill>
+                  <a:srgbClr val="000000"/>
+                </a:solidFill>
+              </a:rPr>
+              <a:t>Должности: Руководитель направления "Строительство", Руководитель отдела, Старший менеджер по персоналу</a:t>
             </a:r>
             <a:endParaRPr lang="en-US" sz="1200" dirty="0"/>
           </a:p>

--- a/OrgStructure.pptx
+++ b/OrgStructure.pptx
@@ -10,9 +10,12 @@
     <p:sldId id="258" r:id="rId4"/>
     <p:sldId id="259" r:id="rId5"/>
     <p:sldId id="260" r:id="rId6"/>
+    <p:sldId id="261" r:id="rId7"/>
+    <p:sldId id="262" r:id="rId8"/>
+    <p:sldId id="263" r:id="rId9"/>
   </p:sldIdLst>
   <p:notesMasterIdLst>
-    <p:notesMasterId r:id="rId7"/>
+    <p:notesMasterId r:id="rId10"/>
   </p:notesMasterIdLst>
   <p:sldSz cx="9144000" cy="5143500"/>
   <p:notesSz cx="5143500" cy="9144000"/>
@@ -882,6 +885,270 @@
             <a:fld id="{F7021451-1387-4CA6-816F-3879F97B5CBC}" type="slidenum">
               <a:rPr lang="en-US"/>
               <a:t>5</a:t>
+            </a:fld>
+            <a:endParaRPr lang="en-US"/>
+          </a:p>
+        </p:txBody>
+      </p:sp>
+    </p:spTree>
+    <p:extLst>
+      <p:ext uri="{BB962C8B-B14F-4D97-AF65-F5344CB8AC3E}">
+        <p14:creationId xmlns:p14="http://schemas.microsoft.com/office/powerpoint/2010/main" val="1024086991"/>
+      </p:ext>
+    </p:extLst>
+  </p:cSld>
+  <p:clrMapOvr>
+    <a:masterClrMapping/>
+  </p:clrMapOvr>
+</p:notes>
+</file>
+
+<file path=ppt/notesSlides/notesSlide6.xml><?xml version="1.0" encoding="utf-8"?>
+<p:notes xmlns:a="http://schemas.openxmlformats.org/drawingml/2006/main" xmlns:r="http://schemas.openxmlformats.org/officeDocument/2006/relationships" xmlns:p="http://schemas.openxmlformats.org/presentationml/2006/main">
+  <p:cSld>
+    <p:spTree>
+      <p:nvGrpSpPr>
+        <p:cNvPr id="1" name=""/>
+        <p:cNvGrpSpPr/>
+        <p:nvPr/>
+      </p:nvGrpSpPr>
+      <p:grpSpPr>
+        <a:xfrm>
+          <a:off x="0" y="0"/>
+          <a:ext cx="0" cy="0"/>
+          <a:chOff x="0" y="0"/>
+          <a:chExt cx="0" cy="0"/>
+        </a:xfrm>
+      </p:grpSpPr>
+      <p:sp>
+        <p:nvSpPr>
+          <p:cNvPr id="2" name="Slide Image Placeholder 1"/>
+          <p:cNvSpPr>
+            <a:spLocks noGrp="1" noRot="1" noChangeAspect="1"/>
+          </p:cNvSpPr>
+          <p:nvPr>
+            <p:ph type="sldImg"/>
+          </p:nvPr>
+        </p:nvSpPr>
+        <p:spPr/>
+      </p:sp>
+      <p:sp>
+        <p:nvSpPr>
+          <p:cNvPr id="3" name="Notes Placeholder 2"/>
+          <p:cNvSpPr>
+            <a:spLocks noGrp="1"/>
+          </p:cNvSpPr>
+          <p:nvPr>
+            <p:ph type="body" idx="1"/>
+          </p:nvPr>
+        </p:nvSpPr>
+        <p:spPr/>
+        <p:txBody>
+          <a:bodyPr/>
+          <a:lstStyle/>
+          <a:p>
+            <a:r>
+              <a:rPr lang="en-US" dirty="0"/>
+              <a:t/>
+            </a:r>
+            <a:endParaRPr lang="en-US" dirty="0"/>
+          </a:p>
+        </p:txBody>
+      </p:sp>
+      <p:sp>
+        <p:nvSpPr>
+          <p:cNvPr id="4" name="Slide Number Placeholder 3"/>
+          <p:cNvSpPr>
+            <a:spLocks noGrp="1"/>
+          </p:cNvSpPr>
+          <p:nvPr>
+            <p:ph type="sldNum" sz="quarter" idx="10"/>
+          </p:nvPr>
+        </p:nvSpPr>
+        <p:spPr/>
+        <p:txBody>
+          <a:bodyPr/>
+          <a:lstStyle/>
+          <a:p>
+            <a:fld id="{F7021451-1387-4CA6-816F-3879F97B5CBC}" type="slidenum">
+              <a:rPr lang="en-US"/>
+              <a:t>6</a:t>
+            </a:fld>
+            <a:endParaRPr lang="en-US"/>
+          </a:p>
+        </p:txBody>
+      </p:sp>
+    </p:spTree>
+    <p:extLst>
+      <p:ext uri="{BB962C8B-B14F-4D97-AF65-F5344CB8AC3E}">
+        <p14:creationId xmlns:p14="http://schemas.microsoft.com/office/powerpoint/2010/main" val="1024086991"/>
+      </p:ext>
+    </p:extLst>
+  </p:cSld>
+  <p:clrMapOvr>
+    <a:masterClrMapping/>
+  </p:clrMapOvr>
+</p:notes>
+</file>
+
+<file path=ppt/notesSlides/notesSlide7.xml><?xml version="1.0" encoding="utf-8"?>
+<p:notes xmlns:a="http://schemas.openxmlformats.org/drawingml/2006/main" xmlns:r="http://schemas.openxmlformats.org/officeDocument/2006/relationships" xmlns:p="http://schemas.openxmlformats.org/presentationml/2006/main">
+  <p:cSld>
+    <p:spTree>
+      <p:nvGrpSpPr>
+        <p:cNvPr id="1" name=""/>
+        <p:cNvGrpSpPr/>
+        <p:nvPr/>
+      </p:nvGrpSpPr>
+      <p:grpSpPr>
+        <a:xfrm>
+          <a:off x="0" y="0"/>
+          <a:ext cx="0" cy="0"/>
+          <a:chOff x="0" y="0"/>
+          <a:chExt cx="0" cy="0"/>
+        </a:xfrm>
+      </p:grpSpPr>
+      <p:sp>
+        <p:nvSpPr>
+          <p:cNvPr id="2" name="Slide Image Placeholder 1"/>
+          <p:cNvSpPr>
+            <a:spLocks noGrp="1" noRot="1" noChangeAspect="1"/>
+          </p:cNvSpPr>
+          <p:nvPr>
+            <p:ph type="sldImg"/>
+          </p:nvPr>
+        </p:nvSpPr>
+        <p:spPr/>
+      </p:sp>
+      <p:sp>
+        <p:nvSpPr>
+          <p:cNvPr id="3" name="Notes Placeholder 2"/>
+          <p:cNvSpPr>
+            <a:spLocks noGrp="1"/>
+          </p:cNvSpPr>
+          <p:nvPr>
+            <p:ph type="body" idx="1"/>
+          </p:nvPr>
+        </p:nvSpPr>
+        <p:spPr/>
+        <p:txBody>
+          <a:bodyPr/>
+          <a:lstStyle/>
+          <a:p>
+            <a:r>
+              <a:rPr lang="en-US" dirty="0"/>
+              <a:t/>
+            </a:r>
+            <a:endParaRPr lang="en-US" dirty="0"/>
+          </a:p>
+        </p:txBody>
+      </p:sp>
+      <p:sp>
+        <p:nvSpPr>
+          <p:cNvPr id="4" name="Slide Number Placeholder 3"/>
+          <p:cNvSpPr>
+            <a:spLocks noGrp="1"/>
+          </p:cNvSpPr>
+          <p:nvPr>
+            <p:ph type="sldNum" sz="quarter" idx="10"/>
+          </p:nvPr>
+        </p:nvSpPr>
+        <p:spPr/>
+        <p:txBody>
+          <a:bodyPr/>
+          <a:lstStyle/>
+          <a:p>
+            <a:fld id="{F7021451-1387-4CA6-816F-3879F97B5CBC}" type="slidenum">
+              <a:rPr lang="en-US"/>
+              <a:t>7</a:t>
+            </a:fld>
+            <a:endParaRPr lang="en-US"/>
+          </a:p>
+        </p:txBody>
+      </p:sp>
+    </p:spTree>
+    <p:extLst>
+      <p:ext uri="{BB962C8B-B14F-4D97-AF65-F5344CB8AC3E}">
+        <p14:creationId xmlns:p14="http://schemas.microsoft.com/office/powerpoint/2010/main" val="1024086991"/>
+      </p:ext>
+    </p:extLst>
+  </p:cSld>
+  <p:clrMapOvr>
+    <a:masterClrMapping/>
+  </p:clrMapOvr>
+</p:notes>
+</file>
+
+<file path=ppt/notesSlides/notesSlide8.xml><?xml version="1.0" encoding="utf-8"?>
+<p:notes xmlns:a="http://schemas.openxmlformats.org/drawingml/2006/main" xmlns:r="http://schemas.openxmlformats.org/officeDocument/2006/relationships" xmlns:p="http://schemas.openxmlformats.org/presentationml/2006/main">
+  <p:cSld>
+    <p:spTree>
+      <p:nvGrpSpPr>
+        <p:cNvPr id="1" name=""/>
+        <p:cNvGrpSpPr/>
+        <p:nvPr/>
+      </p:nvGrpSpPr>
+      <p:grpSpPr>
+        <a:xfrm>
+          <a:off x="0" y="0"/>
+          <a:ext cx="0" cy="0"/>
+          <a:chOff x="0" y="0"/>
+          <a:chExt cx="0" cy="0"/>
+        </a:xfrm>
+      </p:grpSpPr>
+      <p:sp>
+        <p:nvSpPr>
+          <p:cNvPr id="2" name="Slide Image Placeholder 1"/>
+          <p:cNvSpPr>
+            <a:spLocks noGrp="1" noRot="1" noChangeAspect="1"/>
+          </p:cNvSpPr>
+          <p:nvPr>
+            <p:ph type="sldImg"/>
+          </p:nvPr>
+        </p:nvSpPr>
+        <p:spPr/>
+      </p:sp>
+      <p:sp>
+        <p:nvSpPr>
+          <p:cNvPr id="3" name="Notes Placeholder 2"/>
+          <p:cNvSpPr>
+            <a:spLocks noGrp="1"/>
+          </p:cNvSpPr>
+          <p:nvPr>
+            <p:ph type="body" idx="1"/>
+          </p:nvPr>
+        </p:nvSpPr>
+        <p:spPr/>
+        <p:txBody>
+          <a:bodyPr/>
+          <a:lstStyle/>
+          <a:p>
+            <a:r>
+              <a:rPr lang="en-US" dirty="0"/>
+              <a:t/>
+            </a:r>
+            <a:endParaRPr lang="en-US" dirty="0"/>
+          </a:p>
+        </p:txBody>
+      </p:sp>
+      <p:sp>
+        <p:nvSpPr>
+          <p:cNvPr id="4" name="Slide Number Placeholder 3"/>
+          <p:cNvSpPr>
+            <a:spLocks noGrp="1"/>
+          </p:cNvSpPr>
+          <p:nvPr>
+            <p:ph type="sldNum" sz="quarter" idx="10"/>
+          </p:nvPr>
+        </p:nvSpPr>
+        <p:spPr/>
+        <p:txBody>
+          <a:bodyPr/>
+          <a:lstStyle/>
+          <a:p>
+            <a:fld id="{F7021451-1387-4CA6-816F-3879F97B5CBC}" type="slidenum">
+              <a:rPr lang="en-US"/>
+              <a:t>8</a:t>
             </a:fld>
             <a:endParaRPr lang="en-US"/>
           </a:p>
@@ -1254,7 +1521,7 @@
                   <a:srgbClr val="000000"/>
                 </a:solidFill>
               </a:rPr>
-              <a:t>Дирекция по персоналу (26)</a:t>
+              <a:t>Дирекция по информационным технологиям (43)</a:t>
             </a:r>
             <a:endParaRPr lang="en-US" sz="1800" dirty="0"/>
           </a:p>
@@ -1290,45 +1557,9 @@
                   <a:srgbClr val="000000"/>
                 </a:solidFill>
               </a:rPr>
-              <a:t>Руководитель: Невзорова Екатерина Викторовна</a:t>
+              <a:t>Руководитель: Быковский Роман Вадимович</a:t>
             </a:r>
             <a:endParaRPr lang="en-US" sz="1400" dirty="0"/>
-          </a:p>
-        </p:txBody>
-      </p:sp>
-      <p:sp>
-        <p:nvSpPr>
-          <p:cNvPr id="4" name="Text 2"/>
-          <p:cNvSpPr/>
-          <p:nvPr/>
-        </p:nvSpPr>
-        <p:spPr>
-          <a:xfrm>
-            <a:off x="457200" y="1371600"/>
-            <a:ext cx="6858000" cy="0"/>
-          </a:xfrm>
-          <a:prstGeom prst="rect">
-            <a:avLst/>
-          </a:prstGeom>
-          <a:noFill/>
-          <a:ln/>
-        </p:spPr>
-        <p:txBody>
-          <a:bodyPr wrap="square" rtlCol="0" anchor="ctr"/>
-          <a:lstStyle/>
-          <a:p>
-            <a:pPr indent="0" marL="0">
-              <a:buNone/>
-            </a:pPr>
-            <a:r>
-              <a:rPr lang="en-US" sz="1200" dirty="0">
-                <a:solidFill>
-                  <a:srgbClr val="000000"/>
-                </a:solidFill>
-              </a:rPr>
-              <a:t>Должности: HR бизнес-партнёр, Административный ассистент, Директор по персоналу, Заместитель Генерального директора - Директор по персоналу, Менеджер по внутрикорпоративным коммуникациям, Руководитель направления охраны труда</a:t>
-            </a:r>
-            <a:endParaRPr lang="en-US" sz="1200" dirty="0"/>
           </a:p>
         </p:txBody>
       </p:sp>
@@ -1387,7 +1618,7 @@
                   <a:srgbClr val="000000"/>
                 </a:solidFill>
               </a:rPr>
-              <a:t>Отдел кадрового сопровождения производственного персонала (5)</a:t>
+              <a:t>Отдел аналитики (5)</a:t>
             </a:r>
             <a:endParaRPr lang="en-US" sz="1800" dirty="0"/>
           </a:p>
@@ -1423,7 +1654,7 @@
                   <a:srgbClr val="000000"/>
                 </a:solidFill>
               </a:rPr>
-              <a:t>Руководитель: Зелик Марина Сергеевна</a:t>
+              <a:t>Руководитель: Шапошников Алексей Викторович</a:t>
             </a:r>
             <a:endParaRPr lang="en-US" sz="1400" dirty="0"/>
           </a:p>
@@ -1459,7 +1690,7 @@
                   <a:srgbClr val="000000"/>
                 </a:solidFill>
               </a:rPr>
-              <a:t>Должности: Ведущий специалист, Ведущий специалист по кадровому администрированию, Руководитель отдела, Специалист по кадровому администрированию, Специалист по привлечению персонала</a:t>
+              <a:t>Должности: Бизнес-аналитик, Руководитель отдела, Тестировщик</a:t>
             </a:r>
             <a:endParaRPr lang="en-US" sz="1200" dirty="0"/>
           </a:p>
@@ -1520,7 +1751,7 @@
                   <a:srgbClr val="000000"/>
                 </a:solidFill>
               </a:rPr>
-              <a:t>Отдел кадровой экспертизы (5)</a:t>
+              <a:t>Отдел информационных технологий в г. Москве (4)</a:t>
             </a:r>
             <a:endParaRPr lang="en-US" sz="1800" dirty="0"/>
           </a:p>
@@ -1556,7 +1787,7 @@
                   <a:srgbClr val="000000"/>
                 </a:solidFill>
               </a:rPr>
-              <a:t>Руководитель: Сеничева Надежда Алексеевна</a:t>
+              <a:t>Руководитель: Толкаев Евгений Юрьевич</a:t>
             </a:r>
             <a:endParaRPr lang="en-US" sz="1400" dirty="0"/>
           </a:p>
@@ -1592,7 +1823,7 @@
                   <a:srgbClr val="000000"/>
                 </a:solidFill>
               </a:rPr>
-              <a:t>Должности: Ведущий специалист, Руководитель отдела, Специалист</a:t>
+              <a:t>Должности: Ведущий специалист технической поддержки, Руководитель отдела, Специалист технической поддержки</a:t>
             </a:r>
             <a:endParaRPr lang="en-US" sz="1200" dirty="0"/>
           </a:p>
@@ -1653,7 +1884,7 @@
                   <a:srgbClr val="000000"/>
                 </a:solidFill>
               </a:rPr>
-              <a:t>Отдел компенсаций и льгот (4)</a:t>
+              <a:t>Отдел инфраструктурных решений (16)</a:t>
             </a:r>
             <a:endParaRPr lang="en-US" sz="1800" dirty="0"/>
           </a:p>
@@ -1689,7 +1920,7 @@
                   <a:srgbClr val="000000"/>
                 </a:solidFill>
               </a:rPr>
-              <a:t>Руководитель: Захарова Екатерина Геннадьевна</a:t>
+              <a:t>Руководитель: Быковский Роман Вадимович</a:t>
             </a:r>
             <a:endParaRPr lang="en-US" sz="1400" dirty="0"/>
           </a:p>
@@ -1725,7 +1956,7 @@
                   <a:srgbClr val="000000"/>
                 </a:solidFill>
               </a:rPr>
-              <a:t>Должности: Главный специалист, Руководитель отдела, Специалист, Специалист по труду и заработной плате</a:t>
+              <a:t>Должности: Ведущий инженер-разработчик, Ведущий сетевой инженер, Ведущий системный администратор, Инженер по информационной безопасности, Инженер-разработчик, Руководитель отдела, Сетевой инженер, Системный администратор, Специалист по информационной безопасности</a:t>
             </a:r>
             <a:endParaRPr lang="en-US" sz="1200" dirty="0"/>
           </a:p>
@@ -1786,7 +2017,7 @@
                   <a:srgbClr val="000000"/>
                 </a:solidFill>
               </a:rPr>
-              <a:t>Отдел привлечения и развития (7)</a:t>
+              <a:t>Группа технической поддержки (7)</a:t>
             </a:r>
             <a:endParaRPr lang="en-US" sz="1800" dirty="0"/>
           </a:p>
@@ -1822,7 +2053,7 @@
                   <a:srgbClr val="000000"/>
                 </a:solidFill>
               </a:rPr>
-              <a:t>Руководитель: Васенина Мария Анатольевна</a:t>
+              <a:t>Руководитель: Ануфриев Игорь Николаевич</a:t>
             </a:r>
             <a:endParaRPr lang="en-US" sz="1400" dirty="0"/>
           </a:p>
@@ -1858,7 +2089,370 @@
                   <a:srgbClr val="000000"/>
                 </a:solidFill>
               </a:rPr>
-              <a:t>Должности: Руководитель направления "Строительство", Руководитель отдела, Старший менеджер по персоналу</a:t>
+              <a:t>Должности: Ведущий специалист, Ведущий специалист технической поддержки, Руководитель группы, Специалист, Специалист технической поддержки</a:t>
+            </a:r>
+            <a:endParaRPr lang="en-US" sz="1200" dirty="0"/>
+          </a:p>
+        </p:txBody>
+      </p:sp>
+    </p:spTree>
+  </p:cSld>
+  <p:clrMapOvr>
+    <a:masterClrMapping/>
+  </p:clrMapOvr>
+</p:sld>
+</file>
+
+<file path=ppt/slides/slide6.xml><?xml version="1.0" encoding="utf-8"?>
+<p:sld xmlns:a="http://schemas.openxmlformats.org/drawingml/2006/main" xmlns:r="http://schemas.openxmlformats.org/officeDocument/2006/relationships" xmlns:p="http://schemas.openxmlformats.org/presentationml/2006/main">
+  <p:cSld name="Slide 6">
+    <p:spTree>
+      <p:nvGrpSpPr>
+        <p:cNvPr id="1" name=""/>
+        <p:cNvGrpSpPr/>
+        <p:nvPr/>
+      </p:nvGrpSpPr>
+      <p:grpSpPr>
+        <a:xfrm>
+          <a:off x="0" y="0"/>
+          <a:ext cx="0" cy="0"/>
+          <a:chOff x="0" y="0"/>
+          <a:chExt cx="0" cy="0"/>
+        </a:xfrm>
+      </p:grpSpPr>
+      <p:sp>
+        <p:nvSpPr>
+          <p:cNvPr id="2" name="Text 0"/>
+          <p:cNvSpPr/>
+          <p:nvPr/>
+        </p:nvSpPr>
+        <p:spPr>
+          <a:xfrm>
+            <a:off x="457200" y="457200"/>
+            <a:ext cx="6858000" cy="0"/>
+          </a:xfrm>
+          <a:prstGeom prst="rect">
+            <a:avLst/>
+          </a:prstGeom>
+          <a:noFill/>
+          <a:ln/>
+        </p:spPr>
+        <p:txBody>
+          <a:bodyPr wrap="square" rtlCol="0" anchor="ctr"/>
+          <a:lstStyle/>
+          <a:p>
+            <a:pPr indent="0" marL="0">
+              <a:buNone/>
+            </a:pPr>
+            <a:r>
+              <a:rPr lang="en-US" sz="1800" b="1" dirty="0">
+                <a:solidFill>
+                  <a:srgbClr val="000000"/>
+                </a:solidFill>
+              </a:rPr>
+              <a:t>Отдел программирования (11)</a:t>
+            </a:r>
+            <a:endParaRPr lang="en-US" sz="1800" dirty="0"/>
+          </a:p>
+        </p:txBody>
+      </p:sp>
+      <p:sp>
+        <p:nvSpPr>
+          <p:cNvPr id="3" name="Text 1"/>
+          <p:cNvSpPr/>
+          <p:nvPr/>
+        </p:nvSpPr>
+        <p:spPr>
+          <a:xfrm>
+            <a:off x="457200" y="1371600"/>
+            <a:ext cx="6858000" cy="0"/>
+          </a:xfrm>
+          <a:prstGeom prst="rect">
+            <a:avLst/>
+          </a:prstGeom>
+          <a:noFill/>
+          <a:ln/>
+        </p:spPr>
+        <p:txBody>
+          <a:bodyPr wrap="square" rtlCol="0" anchor="ctr"/>
+          <a:lstStyle/>
+          <a:p>
+            <a:pPr indent="0" marL="0">
+              <a:buNone/>
+            </a:pPr>
+            <a:r>
+              <a:rPr lang="en-US" sz="1200" dirty="0">
+                <a:solidFill>
+                  <a:srgbClr val="000000"/>
+                </a:solidFill>
+              </a:rPr>
+              <a:t>Должности: Ведущий инженер-программист, Инженер-программист, Тестировщик</a:t>
+            </a:r>
+            <a:endParaRPr lang="en-US" sz="1200" dirty="0"/>
+          </a:p>
+        </p:txBody>
+      </p:sp>
+    </p:spTree>
+  </p:cSld>
+  <p:clrMapOvr>
+    <a:masterClrMapping/>
+  </p:clrMapOvr>
+</p:sld>
+</file>
+
+<file path=ppt/slides/slide7.xml><?xml version="1.0" encoding="utf-8"?>
+<p:sld xmlns:a="http://schemas.openxmlformats.org/drawingml/2006/main" xmlns:r="http://schemas.openxmlformats.org/officeDocument/2006/relationships" xmlns:p="http://schemas.openxmlformats.org/presentationml/2006/main">
+  <p:cSld name="Slide 7">
+    <p:spTree>
+      <p:nvGrpSpPr>
+        <p:cNvPr id="1" name=""/>
+        <p:cNvGrpSpPr/>
+        <p:nvPr/>
+      </p:nvGrpSpPr>
+      <p:grpSpPr>
+        <a:xfrm>
+          <a:off x="0" y="0"/>
+          <a:ext cx="0" cy="0"/>
+          <a:chOff x="0" y="0"/>
+          <a:chExt cx="0" cy="0"/>
+        </a:xfrm>
+      </p:grpSpPr>
+      <p:sp>
+        <p:nvSpPr>
+          <p:cNvPr id="2" name="Text 0"/>
+          <p:cNvSpPr/>
+          <p:nvPr/>
+        </p:nvSpPr>
+        <p:spPr>
+          <a:xfrm>
+            <a:off x="457200" y="457200"/>
+            <a:ext cx="6858000" cy="0"/>
+          </a:xfrm>
+          <a:prstGeom prst="rect">
+            <a:avLst/>
+          </a:prstGeom>
+          <a:noFill/>
+          <a:ln/>
+        </p:spPr>
+        <p:txBody>
+          <a:bodyPr wrap="square" rtlCol="0" anchor="ctr"/>
+          <a:lstStyle/>
+          <a:p>
+            <a:pPr indent="0" marL="0">
+              <a:buNone/>
+            </a:pPr>
+            <a:r>
+              <a:rPr lang="en-US" sz="1800" b="1" dirty="0">
+                <a:solidFill>
+                  <a:srgbClr val="000000"/>
+                </a:solidFill>
+              </a:rPr>
+              <a:t>Отдел развития цифровых платформ (2)</a:t>
+            </a:r>
+            <a:endParaRPr lang="en-US" sz="1800" dirty="0"/>
+          </a:p>
+        </p:txBody>
+      </p:sp>
+      <p:sp>
+        <p:nvSpPr>
+          <p:cNvPr id="3" name="Text 1"/>
+          <p:cNvSpPr/>
+          <p:nvPr/>
+        </p:nvSpPr>
+        <p:spPr>
+          <a:xfrm>
+            <a:off x="457200" y="914400"/>
+            <a:ext cx="6858000" cy="0"/>
+          </a:xfrm>
+          <a:prstGeom prst="rect">
+            <a:avLst/>
+          </a:prstGeom>
+          <a:noFill/>
+          <a:ln/>
+        </p:spPr>
+        <p:txBody>
+          <a:bodyPr wrap="square" rtlCol="0" anchor="ctr"/>
+          <a:lstStyle/>
+          <a:p>
+            <a:pPr indent="0" marL="0">
+              <a:buNone/>
+            </a:pPr>
+            <a:r>
+              <a:rPr lang="en-US" sz="1400" dirty="0">
+                <a:solidFill>
+                  <a:srgbClr val="000000"/>
+                </a:solidFill>
+              </a:rPr>
+              <a:t>Руководитель: Рубан Федор Олегович</a:t>
+            </a:r>
+            <a:endParaRPr lang="en-US" sz="1400" dirty="0"/>
+          </a:p>
+        </p:txBody>
+      </p:sp>
+      <p:sp>
+        <p:nvSpPr>
+          <p:cNvPr id="4" name="Text 2"/>
+          <p:cNvSpPr/>
+          <p:nvPr/>
+        </p:nvSpPr>
+        <p:spPr>
+          <a:xfrm>
+            <a:off x="457200" y="1371600"/>
+            <a:ext cx="6858000" cy="0"/>
+          </a:xfrm>
+          <a:prstGeom prst="rect">
+            <a:avLst/>
+          </a:prstGeom>
+          <a:noFill/>
+          <a:ln/>
+        </p:spPr>
+        <p:txBody>
+          <a:bodyPr wrap="square" rtlCol="0" anchor="ctr"/>
+          <a:lstStyle/>
+          <a:p>
+            <a:pPr indent="0" marL="0">
+              <a:buNone/>
+            </a:pPr>
+            <a:r>
+              <a:rPr lang="en-US" sz="1200" dirty="0">
+                <a:solidFill>
+                  <a:srgbClr val="000000"/>
+                </a:solidFill>
+              </a:rPr>
+              <a:t>Должности: Веб-дизайнер, Руководитель отдела</a:t>
+            </a:r>
+            <a:endParaRPr lang="en-US" sz="1200" dirty="0"/>
+          </a:p>
+        </p:txBody>
+      </p:sp>
+    </p:spTree>
+  </p:cSld>
+  <p:clrMapOvr>
+    <a:masterClrMapping/>
+  </p:clrMapOvr>
+</p:sld>
+</file>
+
+<file path=ppt/slides/slide8.xml><?xml version="1.0" encoding="utf-8"?>
+<p:sld xmlns:a="http://schemas.openxmlformats.org/drawingml/2006/main" xmlns:r="http://schemas.openxmlformats.org/officeDocument/2006/relationships" xmlns:p="http://schemas.openxmlformats.org/presentationml/2006/main">
+  <p:cSld name="Slide 8">
+    <p:spTree>
+      <p:nvGrpSpPr>
+        <p:cNvPr id="1" name=""/>
+        <p:cNvGrpSpPr/>
+        <p:nvPr/>
+      </p:nvGrpSpPr>
+      <p:grpSpPr>
+        <a:xfrm>
+          <a:off x="0" y="0"/>
+          <a:ext cx="0" cy="0"/>
+          <a:chOff x="0" y="0"/>
+          <a:chExt cx="0" cy="0"/>
+        </a:xfrm>
+      </p:grpSpPr>
+      <p:sp>
+        <p:nvSpPr>
+          <p:cNvPr id="2" name="Text 0"/>
+          <p:cNvSpPr/>
+          <p:nvPr/>
+        </p:nvSpPr>
+        <p:spPr>
+          <a:xfrm>
+            <a:off x="457200" y="457200"/>
+            <a:ext cx="6858000" cy="0"/>
+          </a:xfrm>
+          <a:prstGeom prst="rect">
+            <a:avLst/>
+          </a:prstGeom>
+          <a:noFill/>
+          <a:ln/>
+        </p:spPr>
+        <p:txBody>
+          <a:bodyPr wrap="square" rtlCol="0" anchor="ctr"/>
+          <a:lstStyle/>
+          <a:p>
+            <a:pPr indent="0" marL="0">
+              <a:buNone/>
+            </a:pPr>
+            <a:r>
+              <a:rPr lang="en-US" sz="1800" b="1" dirty="0">
+                <a:solidFill>
+                  <a:srgbClr val="000000"/>
+                </a:solidFill>
+              </a:rPr>
+              <a:t>Отдел разработки веб-решений (5)</a:t>
+            </a:r>
+            <a:endParaRPr lang="en-US" sz="1800" dirty="0"/>
+          </a:p>
+        </p:txBody>
+      </p:sp>
+      <p:sp>
+        <p:nvSpPr>
+          <p:cNvPr id="3" name="Text 1"/>
+          <p:cNvSpPr/>
+          <p:nvPr/>
+        </p:nvSpPr>
+        <p:spPr>
+          <a:xfrm>
+            <a:off x="457200" y="914400"/>
+            <a:ext cx="6858000" cy="0"/>
+          </a:xfrm>
+          <a:prstGeom prst="rect">
+            <a:avLst/>
+          </a:prstGeom>
+          <a:noFill/>
+          <a:ln/>
+        </p:spPr>
+        <p:txBody>
+          <a:bodyPr wrap="square" rtlCol="0" anchor="ctr"/>
+          <a:lstStyle/>
+          <a:p>
+            <a:pPr indent="0" marL="0">
+              <a:buNone/>
+            </a:pPr>
+            <a:r>
+              <a:rPr lang="en-US" sz="1400" dirty="0">
+                <a:solidFill>
+                  <a:srgbClr val="000000"/>
+                </a:solidFill>
+              </a:rPr>
+              <a:t>Руководитель: Горев Андрей Юрьевич</a:t>
+            </a:r>
+            <a:endParaRPr lang="en-US" sz="1400" dirty="0"/>
+          </a:p>
+        </p:txBody>
+      </p:sp>
+      <p:sp>
+        <p:nvSpPr>
+          <p:cNvPr id="4" name="Text 2"/>
+          <p:cNvSpPr/>
+          <p:nvPr/>
+        </p:nvSpPr>
+        <p:spPr>
+          <a:xfrm>
+            <a:off x="457200" y="1371600"/>
+            <a:ext cx="6858000" cy="0"/>
+          </a:xfrm>
+          <a:prstGeom prst="rect">
+            <a:avLst/>
+          </a:prstGeom>
+          <a:noFill/>
+          <a:ln/>
+        </p:spPr>
+        <p:txBody>
+          <a:bodyPr wrap="square" rtlCol="0" anchor="ctr"/>
+          <a:lstStyle/>
+          <a:p>
+            <a:pPr indent="0" marL="0">
+              <a:buNone/>
+            </a:pPr>
+            <a:r>
+              <a:rPr lang="en-US" sz="1200" dirty="0">
+                <a:solidFill>
+                  <a:srgbClr val="000000"/>
+                </a:solidFill>
+              </a:rPr>
+              <a:t>Должности: Веб-разработчик, Ведущий веб-разработчик, Младший веб-разработчик, Руководитель отдела</a:t>
             </a:r>
             <a:endParaRPr lang="en-US" sz="1200" dirty="0"/>
           </a:p>

--- a/OrgStructure.pptx
+++ b/OrgStructure.pptx
@@ -936,7 +936,7 @@
                   <a:srgbClr val="000000"/>
                 </a:solidFill>
               </a:rPr>
-              <a:t>Дирекция по информационным технологиям</a:t>
+              <a:t>Дирекция по инвестициям</a:t>
             </a:r>
             <a:endParaRPr lang="en-US" sz="1200" dirty="0"/>
           </a:p>
@@ -950,7 +950,7 @@
                   <a:srgbClr val="000000"/>
                 </a:solidFill>
               </a:rPr>
-              <a:t>Руководитель: Быковский Роман Вадимович</a:t>
+              <a:t>Руководитель: Болилая Александра Сергеевна</a:t>
             </a:r>
             <a:endParaRPr lang="en-US" sz="1200" dirty="0"/>
           </a:p>
@@ -988,7 +988,7 @@
                   <a:srgbClr val="000000"/>
                 </a:solidFill>
               </a:rPr>
-              <a:t>Отдел аналитики</a:t>
+              <a:t>Отдел ценных бумаг и аналитики</a:t>
             </a:r>
             <a:endParaRPr lang="en-US" sz="1200" dirty="0"/>
           </a:p>
@@ -1002,735 +1002,7 @@
                   <a:srgbClr val="000000"/>
                 </a:solidFill>
               </a:rPr>
-              <a:t>Руководитель: Шапошников Алексей Викторович</a:t>
-            </a:r>
-            <a:endParaRPr lang="en-US" sz="1200" dirty="0"/>
-          </a:p>
-        </p:txBody>
-      </p:sp>
-      <p:sp>
-        <p:nvSpPr>
-          <p:cNvPr id="5" name="Text 3"/>
-          <p:cNvSpPr/>
-          <p:nvPr/>
-        </p:nvSpPr>
-        <p:spPr>
-          <a:xfrm>
-            <a:off x="3931920" y="2560320"/>
-            <a:ext cx="3200400" cy="640080"/>
-          </a:xfrm>
-          <a:prstGeom prst="rect">
-            <a:avLst/>
-          </a:prstGeom>
-          <a:solidFill>
-            <a:srgbClr val="BFDFFF"/>
-          </a:solidFill>
-          <a:ln/>
-        </p:spPr>
-        <p:txBody>
-          <a:bodyPr wrap="square" rtlCol="0" anchor="ctr"/>
-          <a:lstStyle/>
-          <a:p>
-            <a:pPr algn="ctr" indent="0" marL="0">
-              <a:buNone/>
-            </a:pPr>
-            <a:r>
-              <a:rPr lang="en-US" sz="1200" b="1" dirty="0">
-                <a:solidFill>
-                  <a:srgbClr val="000000"/>
-                </a:solidFill>
-              </a:rPr>
-              <a:t>Отдел информационных технологий в г. Москве</a:t>
-            </a:r>
-            <a:endParaRPr lang="en-US" sz="1200" dirty="0"/>
-          </a:p>
-          <a:p>
-            <a:pPr algn="ctr" indent="0" marL="0">
-              <a:buNone/>
-            </a:pPr>
-            <a:r>
-              <a:rPr lang="en-US" sz="1200" b="1" dirty="0">
-                <a:solidFill>
-                  <a:srgbClr val="000000"/>
-                </a:solidFill>
-              </a:rPr>
-              <a:t>Руководитель: Толкаев Евгений Юрьевич</a:t>
-            </a:r>
-            <a:endParaRPr lang="en-US" sz="1200" dirty="0"/>
-          </a:p>
-        </p:txBody>
-      </p:sp>
-      <p:sp>
-        <p:nvSpPr>
-          <p:cNvPr id="6" name="Text 4"/>
-          <p:cNvSpPr/>
-          <p:nvPr/>
-        </p:nvSpPr>
-        <p:spPr>
-          <a:xfrm>
-            <a:off x="3931920" y="3383280"/>
-            <a:ext cx="3200400" cy="640080"/>
-          </a:xfrm>
-          <a:prstGeom prst="rect">
-            <a:avLst/>
-          </a:prstGeom>
-          <a:solidFill>
-            <a:srgbClr val="BFDFFF"/>
-          </a:solidFill>
-          <a:ln/>
-        </p:spPr>
-        <p:txBody>
-          <a:bodyPr wrap="square" rtlCol="0" anchor="ctr"/>
-          <a:lstStyle/>
-          <a:p>
-            <a:pPr algn="ctr" indent="0" marL="0">
-              <a:buNone/>
-            </a:pPr>
-            <a:r>
-              <a:rPr lang="en-US" sz="1200" b="1" dirty="0">
-                <a:solidFill>
-                  <a:srgbClr val="000000"/>
-                </a:solidFill>
-              </a:rPr>
-              <a:t>Отдел инфраструктурных решений</a:t>
-            </a:r>
-            <a:endParaRPr lang="en-US" sz="1200" dirty="0"/>
-          </a:p>
-          <a:p>
-            <a:pPr algn="ctr" indent="0" marL="0">
-              <a:buNone/>
-            </a:pPr>
-            <a:r>
-              <a:rPr lang="en-US" sz="1200" b="1" dirty="0">
-                <a:solidFill>
-                  <a:srgbClr val="000000"/>
-                </a:solidFill>
-              </a:rPr>
-              <a:t>Руководитель: Быковский Роман Вадимович</a:t>
-            </a:r>
-            <a:endParaRPr lang="en-US" sz="1200" dirty="0"/>
-          </a:p>
-        </p:txBody>
-      </p:sp>
-      <p:sp>
-        <p:nvSpPr>
-          <p:cNvPr id="7" name="Text 5"/>
-          <p:cNvSpPr/>
-          <p:nvPr/>
-        </p:nvSpPr>
-        <p:spPr>
-          <a:xfrm>
-            <a:off x="7406640" y="4206240"/>
-            <a:ext cx="3200400" cy="640080"/>
-          </a:xfrm>
-          <a:prstGeom prst="rect">
-            <a:avLst/>
-          </a:prstGeom>
-          <a:solidFill>
-            <a:srgbClr val="BFDFFF"/>
-          </a:solidFill>
-          <a:ln/>
-        </p:spPr>
-        <p:txBody>
-          <a:bodyPr wrap="square" rtlCol="0" anchor="ctr"/>
-          <a:lstStyle/>
-          <a:p>
-            <a:pPr algn="ctr" indent="0" marL="0">
-              <a:buNone/>
-            </a:pPr>
-            <a:r>
-              <a:rPr lang="en-US" sz="1200" b="1" dirty="0">
-                <a:solidFill>
-                  <a:srgbClr val="000000"/>
-                </a:solidFill>
-              </a:rPr>
-              <a:t>Группа технической поддержки</a:t>
-            </a:r>
-            <a:endParaRPr lang="en-US" sz="1200" dirty="0"/>
-          </a:p>
-          <a:p>
-            <a:pPr algn="ctr" indent="0" marL="0">
-              <a:buNone/>
-            </a:pPr>
-            <a:r>
-              <a:rPr lang="en-US" sz="1200" b="1" dirty="0">
-                <a:solidFill>
-                  <a:srgbClr val="000000"/>
-                </a:solidFill>
-              </a:rPr>
-              <a:t>Руководитель: Ануфриев Игорь Николаевич</a:t>
-            </a:r>
-            <a:endParaRPr lang="en-US" sz="1200" dirty="0"/>
-          </a:p>
-        </p:txBody>
-      </p:sp>
-      <p:sp>
-        <p:nvSpPr>
-          <p:cNvPr id="8" name="Text 6"/>
-          <p:cNvSpPr/>
-          <p:nvPr/>
-        </p:nvSpPr>
-        <p:spPr>
-          <a:xfrm>
-            <a:off x="3931920" y="5029200"/>
-            <a:ext cx="3200400" cy="640080"/>
-          </a:xfrm>
-          <a:prstGeom prst="rect">
-            <a:avLst/>
-          </a:prstGeom>
-          <a:solidFill>
-            <a:srgbClr val="BFDFFF"/>
-          </a:solidFill>
-          <a:ln/>
-        </p:spPr>
-        <p:txBody>
-          <a:bodyPr wrap="square" rtlCol="0" anchor="ctr"/>
-          <a:lstStyle/>
-          <a:p>
-            <a:pPr algn="ctr" indent="0" marL="0">
-              <a:buNone/>
-            </a:pPr>
-            <a:r>
-              <a:rPr lang="en-US" sz="1200" b="1" dirty="0">
-                <a:solidFill>
-                  <a:srgbClr val="000000"/>
-                </a:solidFill>
-              </a:rPr>
-              <a:t>Отдел программирования</a:t>
-            </a:r>
-            <a:endParaRPr lang="en-US" sz="1200" dirty="0"/>
-          </a:p>
-          <a:p>
-            <a:pPr algn="ctr" indent="0" marL="0">
-              <a:buNone/>
-            </a:pPr>
-            <a:r>
-              <a:rPr lang="en-US" sz="1200" b="1" dirty="0">
-                <a:solidFill>
-                  <a:srgbClr val="000000"/>
-                </a:solidFill>
-              </a:rPr>
-              <a:t>Руководитель: —</a:t>
-            </a:r>
-            <a:endParaRPr lang="en-US" sz="1200" dirty="0"/>
-          </a:p>
-        </p:txBody>
-      </p:sp>
-      <p:sp>
-        <p:nvSpPr>
-          <p:cNvPr id="9" name="Text 7"/>
-          <p:cNvSpPr/>
-          <p:nvPr/>
-        </p:nvSpPr>
-        <p:spPr>
-          <a:xfrm>
-            <a:off x="3931920" y="5852160"/>
-            <a:ext cx="3200400" cy="640080"/>
-          </a:xfrm>
-          <a:prstGeom prst="rect">
-            <a:avLst/>
-          </a:prstGeom>
-          <a:solidFill>
-            <a:srgbClr val="BFDFFF"/>
-          </a:solidFill>
-          <a:ln/>
-        </p:spPr>
-        <p:txBody>
-          <a:bodyPr wrap="square" rtlCol="0" anchor="ctr"/>
-          <a:lstStyle/>
-          <a:p>
-            <a:pPr algn="ctr" indent="0" marL="0">
-              <a:buNone/>
-            </a:pPr>
-            <a:r>
-              <a:rPr lang="en-US" sz="1200" b="1" dirty="0">
-                <a:solidFill>
-                  <a:srgbClr val="000000"/>
-                </a:solidFill>
-              </a:rPr>
-              <a:t>Отдел развития цифровых платформ</a:t>
-            </a:r>
-            <a:endParaRPr lang="en-US" sz="1200" dirty="0"/>
-          </a:p>
-          <a:p>
-            <a:pPr algn="ctr" indent="0" marL="0">
-              <a:buNone/>
-            </a:pPr>
-            <a:r>
-              <a:rPr lang="en-US" sz="1200" b="1" dirty="0">
-                <a:solidFill>
-                  <a:srgbClr val="000000"/>
-                </a:solidFill>
-              </a:rPr>
-              <a:t>Руководитель: Рубан Федор Олегович</a:t>
-            </a:r>
-            <a:endParaRPr lang="en-US" sz="1200" dirty="0"/>
-          </a:p>
-        </p:txBody>
-      </p:sp>
-      <p:sp>
-        <p:nvSpPr>
-          <p:cNvPr id="10" name="Text 8"/>
-          <p:cNvSpPr/>
-          <p:nvPr/>
-        </p:nvSpPr>
-        <p:spPr>
-          <a:xfrm>
-            <a:off x="3931920" y="6675120"/>
-            <a:ext cx="3200400" cy="640080"/>
-          </a:xfrm>
-          <a:prstGeom prst="rect">
-            <a:avLst/>
-          </a:prstGeom>
-          <a:solidFill>
-            <a:srgbClr val="BFDFFF"/>
-          </a:solidFill>
-          <a:ln/>
-        </p:spPr>
-        <p:txBody>
-          <a:bodyPr wrap="square" rtlCol="0" anchor="ctr"/>
-          <a:lstStyle/>
-          <a:p>
-            <a:pPr algn="ctr" indent="0" marL="0">
-              <a:buNone/>
-            </a:pPr>
-            <a:r>
-              <a:rPr lang="en-US" sz="1200" b="1" dirty="0">
-                <a:solidFill>
-                  <a:srgbClr val="000000"/>
-                </a:solidFill>
-              </a:rPr>
-              <a:t>Отдел разработки веб-решений</a:t>
-            </a:r>
-            <a:endParaRPr lang="en-US" sz="1200" dirty="0"/>
-          </a:p>
-          <a:p>
-            <a:pPr algn="ctr" indent="0" marL="0">
-              <a:buNone/>
-            </a:pPr>
-            <a:r>
-              <a:rPr lang="en-US" sz="1200" b="1" dirty="0">
-                <a:solidFill>
-                  <a:srgbClr val="000000"/>
-                </a:solidFill>
-              </a:rPr>
-              <a:t>Руководитель: Горев Андрей Юрьевич</a:t>
-            </a:r>
-            <a:endParaRPr lang="en-US" sz="1200" dirty="0"/>
-          </a:p>
-        </p:txBody>
-      </p:sp>
-      <p:sp>
-        <p:nvSpPr>
-          <p:cNvPr id="11" name="Text 9"/>
-          <p:cNvSpPr/>
-          <p:nvPr/>
-        </p:nvSpPr>
-        <p:spPr>
-          <a:xfrm>
-            <a:off x="457200" y="7498080"/>
-            <a:ext cx="3200400" cy="640080"/>
-          </a:xfrm>
-          <a:prstGeom prst="rect">
-            <a:avLst/>
-          </a:prstGeom>
-          <a:solidFill>
-            <a:srgbClr val="BFDFFF"/>
-          </a:solidFill>
-          <a:ln/>
-        </p:spPr>
-        <p:txBody>
-          <a:bodyPr wrap="square" rtlCol="0" anchor="ctr"/>
-          <a:lstStyle/>
-          <a:p>
-            <a:pPr algn="ctr" indent="0" marL="0">
-              <a:buNone/>
-            </a:pPr>
-            <a:r>
-              <a:rPr lang="en-US" sz="1200" b="1" dirty="0">
-                <a:solidFill>
-                  <a:srgbClr val="000000"/>
-                </a:solidFill>
-              </a:rPr>
-              <a:t>Отдел аналитики</a:t>
-            </a:r>
-            <a:endParaRPr lang="en-US" sz="1200" dirty="0"/>
-          </a:p>
-          <a:p>
-            <a:pPr algn="ctr" indent="0" marL="0">
-              <a:buNone/>
-            </a:pPr>
-            <a:r>
-              <a:rPr lang="en-US" sz="1200" b="1" dirty="0">
-                <a:solidFill>
-                  <a:srgbClr val="000000"/>
-                </a:solidFill>
-              </a:rPr>
-              <a:t>Руководитель: Шапошников Алексей Викторович</a:t>
-            </a:r>
-            <a:endParaRPr lang="en-US" sz="1200" dirty="0"/>
-          </a:p>
-        </p:txBody>
-      </p:sp>
-      <p:sp>
-        <p:nvSpPr>
-          <p:cNvPr id="12" name="Text 10"/>
-          <p:cNvSpPr/>
-          <p:nvPr/>
-        </p:nvSpPr>
-        <p:spPr>
-          <a:xfrm>
-            <a:off x="457200" y="8321040"/>
-            <a:ext cx="3200400" cy="640080"/>
-          </a:xfrm>
-          <a:prstGeom prst="rect">
-            <a:avLst/>
-          </a:prstGeom>
-          <a:solidFill>
-            <a:srgbClr val="BFDFFF"/>
-          </a:solidFill>
-          <a:ln/>
-        </p:spPr>
-        <p:txBody>
-          <a:bodyPr wrap="square" rtlCol="0" anchor="ctr"/>
-          <a:lstStyle/>
-          <a:p>
-            <a:pPr algn="ctr" indent="0" marL="0">
-              <a:buNone/>
-            </a:pPr>
-            <a:r>
-              <a:rPr lang="en-US" sz="1200" b="1" dirty="0">
-                <a:solidFill>
-                  <a:srgbClr val="000000"/>
-                </a:solidFill>
-              </a:rPr>
-              <a:t>Отдел информационных технологий в г. Москве</a:t>
-            </a:r>
-            <a:endParaRPr lang="en-US" sz="1200" dirty="0"/>
-          </a:p>
-          <a:p>
-            <a:pPr algn="ctr" indent="0" marL="0">
-              <a:buNone/>
-            </a:pPr>
-            <a:r>
-              <a:rPr lang="en-US" sz="1200" b="1" dirty="0">
-                <a:solidFill>
-                  <a:srgbClr val="000000"/>
-                </a:solidFill>
-              </a:rPr>
-              <a:t>Руководитель: Толкаев Евгений Юрьевич</a:t>
-            </a:r>
-            <a:endParaRPr lang="en-US" sz="1200" dirty="0"/>
-          </a:p>
-        </p:txBody>
-      </p:sp>
-      <p:sp>
-        <p:nvSpPr>
-          <p:cNvPr id="13" name="Text 11"/>
-          <p:cNvSpPr/>
-          <p:nvPr/>
-        </p:nvSpPr>
-        <p:spPr>
-          <a:xfrm>
-            <a:off x="457200" y="9144000"/>
-            <a:ext cx="3200400" cy="640080"/>
-          </a:xfrm>
-          <a:prstGeom prst="rect">
-            <a:avLst/>
-          </a:prstGeom>
-          <a:solidFill>
-            <a:srgbClr val="BFDFFF"/>
-          </a:solidFill>
-          <a:ln/>
-        </p:spPr>
-        <p:txBody>
-          <a:bodyPr wrap="square" rtlCol="0" anchor="ctr"/>
-          <a:lstStyle/>
-          <a:p>
-            <a:pPr algn="ctr" indent="0" marL="0">
-              <a:buNone/>
-            </a:pPr>
-            <a:r>
-              <a:rPr lang="en-US" sz="1200" b="1" dirty="0">
-                <a:solidFill>
-                  <a:srgbClr val="000000"/>
-                </a:solidFill>
-              </a:rPr>
-              <a:t>Отдел инфраструктурных решений</a:t>
-            </a:r>
-            <a:endParaRPr lang="en-US" sz="1200" dirty="0"/>
-          </a:p>
-          <a:p>
-            <a:pPr algn="ctr" indent="0" marL="0">
-              <a:buNone/>
-            </a:pPr>
-            <a:r>
-              <a:rPr lang="en-US" sz="1200" b="1" dirty="0">
-                <a:solidFill>
-                  <a:srgbClr val="000000"/>
-                </a:solidFill>
-              </a:rPr>
-              <a:t>Руководитель: Быковский Роман Вадимович</a:t>
-            </a:r>
-            <a:endParaRPr lang="en-US" sz="1200" dirty="0"/>
-          </a:p>
-        </p:txBody>
-      </p:sp>
-      <p:sp>
-        <p:nvSpPr>
-          <p:cNvPr id="14" name="Text 12"/>
-          <p:cNvSpPr/>
-          <p:nvPr/>
-        </p:nvSpPr>
-        <p:spPr>
-          <a:xfrm>
-            <a:off x="3931920" y="9966960"/>
-            <a:ext cx="3200400" cy="640080"/>
-          </a:xfrm>
-          <a:prstGeom prst="rect">
-            <a:avLst/>
-          </a:prstGeom>
-          <a:solidFill>
-            <a:srgbClr val="BFDFFF"/>
-          </a:solidFill>
-          <a:ln/>
-        </p:spPr>
-        <p:txBody>
-          <a:bodyPr wrap="square" rtlCol="0" anchor="ctr"/>
-          <a:lstStyle/>
-          <a:p>
-            <a:pPr algn="ctr" indent="0" marL="0">
-              <a:buNone/>
-            </a:pPr>
-            <a:r>
-              <a:rPr lang="en-US" sz="1200" b="1" dirty="0">
-                <a:solidFill>
-                  <a:srgbClr val="000000"/>
-                </a:solidFill>
-              </a:rPr>
-              <a:t>Группа технической поддержки</a:t>
-            </a:r>
-            <a:endParaRPr lang="en-US" sz="1200" dirty="0"/>
-          </a:p>
-          <a:p>
-            <a:pPr algn="ctr" indent="0" marL="0">
-              <a:buNone/>
-            </a:pPr>
-            <a:r>
-              <a:rPr lang="en-US" sz="1200" b="1" dirty="0">
-                <a:solidFill>
-                  <a:srgbClr val="000000"/>
-                </a:solidFill>
-              </a:rPr>
-              <a:t>Руководитель: Ануфриев Игорь Николаевич</a:t>
-            </a:r>
-            <a:endParaRPr lang="en-US" sz="1200" dirty="0"/>
-          </a:p>
-        </p:txBody>
-      </p:sp>
-      <p:sp>
-        <p:nvSpPr>
-          <p:cNvPr id="15" name="Text 13"/>
-          <p:cNvSpPr/>
-          <p:nvPr/>
-        </p:nvSpPr>
-        <p:spPr>
-          <a:xfrm>
-            <a:off x="457200" y="10789920"/>
-            <a:ext cx="3200400" cy="640080"/>
-          </a:xfrm>
-          <a:prstGeom prst="rect">
-            <a:avLst/>
-          </a:prstGeom>
-          <a:solidFill>
-            <a:srgbClr val="BFDFFF"/>
-          </a:solidFill>
-          <a:ln/>
-        </p:spPr>
-        <p:txBody>
-          <a:bodyPr wrap="square" rtlCol="0" anchor="ctr"/>
-          <a:lstStyle/>
-          <a:p>
-            <a:pPr algn="ctr" indent="0" marL="0">
-              <a:buNone/>
-            </a:pPr>
-            <a:r>
-              <a:rPr lang="en-US" sz="1200" b="1" dirty="0">
-                <a:solidFill>
-                  <a:srgbClr val="000000"/>
-                </a:solidFill>
-              </a:rPr>
-              <a:t>Группа технической поддержки</a:t>
-            </a:r>
-            <a:endParaRPr lang="en-US" sz="1200" dirty="0"/>
-          </a:p>
-          <a:p>
-            <a:pPr algn="ctr" indent="0" marL="0">
-              <a:buNone/>
-            </a:pPr>
-            <a:r>
-              <a:rPr lang="en-US" sz="1200" b="1" dirty="0">
-                <a:solidFill>
-                  <a:srgbClr val="000000"/>
-                </a:solidFill>
-              </a:rPr>
-              <a:t>Руководитель: Ануфриев Игорь Николаевич</a:t>
-            </a:r>
-            <a:endParaRPr lang="en-US" sz="1200" dirty="0"/>
-          </a:p>
-        </p:txBody>
-      </p:sp>
-      <p:sp>
-        <p:nvSpPr>
-          <p:cNvPr id="16" name="Text 14"/>
-          <p:cNvSpPr/>
-          <p:nvPr/>
-        </p:nvSpPr>
-        <p:spPr>
-          <a:xfrm>
-            <a:off x="457200" y="11612880"/>
-            <a:ext cx="3200400" cy="640080"/>
-          </a:xfrm>
-          <a:prstGeom prst="rect">
-            <a:avLst/>
-          </a:prstGeom>
-          <a:solidFill>
-            <a:srgbClr val="BFDFFF"/>
-          </a:solidFill>
-          <a:ln/>
-        </p:spPr>
-        <p:txBody>
-          <a:bodyPr wrap="square" rtlCol="0" anchor="ctr"/>
-          <a:lstStyle/>
-          <a:p>
-            <a:pPr algn="ctr" indent="0" marL="0">
-              <a:buNone/>
-            </a:pPr>
-            <a:r>
-              <a:rPr lang="en-US" sz="1200" b="1" dirty="0">
-                <a:solidFill>
-                  <a:srgbClr val="000000"/>
-                </a:solidFill>
-              </a:rPr>
-              <a:t>Отдел программирования</a:t>
-            </a:r>
-            <a:endParaRPr lang="en-US" sz="1200" dirty="0"/>
-          </a:p>
-          <a:p>
-            <a:pPr algn="ctr" indent="0" marL="0">
-              <a:buNone/>
-            </a:pPr>
-            <a:r>
-              <a:rPr lang="en-US" sz="1200" b="1" dirty="0">
-                <a:solidFill>
-                  <a:srgbClr val="000000"/>
-                </a:solidFill>
-              </a:rPr>
-              <a:t>Руководитель: —</a:t>
-            </a:r>
-            <a:endParaRPr lang="en-US" sz="1200" dirty="0"/>
-          </a:p>
-        </p:txBody>
-      </p:sp>
-      <p:sp>
-        <p:nvSpPr>
-          <p:cNvPr id="17" name="Text 15"/>
-          <p:cNvSpPr/>
-          <p:nvPr/>
-        </p:nvSpPr>
-        <p:spPr>
-          <a:xfrm>
-            <a:off x="457200" y="12435840"/>
-            <a:ext cx="3200400" cy="640080"/>
-          </a:xfrm>
-          <a:prstGeom prst="rect">
-            <a:avLst/>
-          </a:prstGeom>
-          <a:solidFill>
-            <a:srgbClr val="BFDFFF"/>
-          </a:solidFill>
-          <a:ln/>
-        </p:spPr>
-        <p:txBody>
-          <a:bodyPr wrap="square" rtlCol="0" anchor="ctr"/>
-          <a:lstStyle/>
-          <a:p>
-            <a:pPr algn="ctr" indent="0" marL="0">
-              <a:buNone/>
-            </a:pPr>
-            <a:r>
-              <a:rPr lang="en-US" sz="1200" b="1" dirty="0">
-                <a:solidFill>
-                  <a:srgbClr val="000000"/>
-                </a:solidFill>
-              </a:rPr>
-              <a:t>Отдел развития цифровых платформ</a:t>
-            </a:r>
-            <a:endParaRPr lang="en-US" sz="1200" dirty="0"/>
-          </a:p>
-          <a:p>
-            <a:pPr algn="ctr" indent="0" marL="0">
-              <a:buNone/>
-            </a:pPr>
-            <a:r>
-              <a:rPr lang="en-US" sz="1200" b="1" dirty="0">
-                <a:solidFill>
-                  <a:srgbClr val="000000"/>
-                </a:solidFill>
-              </a:rPr>
-              <a:t>Руководитель: Рубан Федор Олегович</a:t>
-            </a:r>
-            <a:endParaRPr lang="en-US" sz="1200" dirty="0"/>
-          </a:p>
-        </p:txBody>
-      </p:sp>
-      <p:sp>
-        <p:nvSpPr>
-          <p:cNvPr id="18" name="Text 16"/>
-          <p:cNvSpPr/>
-          <p:nvPr/>
-        </p:nvSpPr>
-        <p:spPr>
-          <a:xfrm>
-            <a:off x="457200" y="13258800"/>
-            <a:ext cx="3200400" cy="640080"/>
-          </a:xfrm>
-          <a:prstGeom prst="rect">
-            <a:avLst/>
-          </a:prstGeom>
-          <a:solidFill>
-            <a:srgbClr val="BFDFFF"/>
-          </a:solidFill>
-          <a:ln/>
-        </p:spPr>
-        <p:txBody>
-          <a:bodyPr wrap="square" rtlCol="0" anchor="ctr"/>
-          <a:lstStyle/>
-          <a:p>
-            <a:pPr algn="ctr" indent="0" marL="0">
-              <a:buNone/>
-            </a:pPr>
-            <a:r>
-              <a:rPr lang="en-US" sz="1200" b="1" dirty="0">
-                <a:solidFill>
-                  <a:srgbClr val="000000"/>
-                </a:solidFill>
-              </a:rPr>
-              <a:t>Отдел разработки веб-решений</a:t>
-            </a:r>
-            <a:endParaRPr lang="en-US" sz="1200" dirty="0"/>
-          </a:p>
-          <a:p>
-            <a:pPr algn="ctr" indent="0" marL="0">
-              <a:buNone/>
-            </a:pPr>
-            <a:r>
-              <a:rPr lang="en-US" sz="1200" b="1" dirty="0">
-                <a:solidFill>
-                  <a:srgbClr val="000000"/>
-                </a:solidFill>
-              </a:rPr>
-              <a:t>Руководитель: Горев Андрей Юрьевич</a:t>
+              <a:t>Руководитель: Соколова Эльвира Сергеевна</a:t>
             </a:r>
             <a:endParaRPr lang="en-US" sz="1200" dirty="0"/>
           </a:p>

--- a/OrgStructure.pptx
+++ b/OrgStructure.pptx
@@ -893,14 +893,14 @@
               <a:buNone/>
             </a:pPr>
             <a:r>
-              <a:rPr lang="en-US" sz="2400" b="1" dirty="0">
+              <a:rPr lang="en-US" sz="2000" b="1" dirty="0">
                 <a:solidFill>
                   <a:srgbClr val="000000"/>
                 </a:solidFill>
               </a:rPr>
               <a:t>Организационная структура</a:t>
             </a:r>
-            <a:endParaRPr lang="en-US" sz="2400" dirty="0"/>
+            <a:endParaRPr lang="en-US" sz="2000" dirty="0"/>
           </a:p>
         </p:txBody>
       </p:sp>
@@ -913,7 +913,7 @@
         <p:spPr>
           <a:xfrm>
             <a:off x="457200" y="914400"/>
-            <a:ext cx="3200400" cy="640080"/>
+            <a:ext cx="2286000" cy="457200"/>
           </a:xfrm>
           <a:prstGeom prst="rect">
             <a:avLst/>
@@ -931,28 +931,28 @@
               <a:buNone/>
             </a:pPr>
             <a:r>
-              <a:rPr lang="en-US" sz="1200" b="1" dirty="0">
+              <a:rPr lang="en-US" sz="900" b="1" dirty="0">
                 <a:solidFill>
                   <a:srgbClr val="000000"/>
                 </a:solidFill>
               </a:rPr>
-              <a:t>Дирекция по инвестициям</a:t>
+              <a:t>Дирекция по инвестициям (7)</a:t>
             </a:r>
-            <a:endParaRPr lang="en-US" sz="1200" dirty="0"/>
+            <a:endParaRPr lang="en-US" sz="900" dirty="0"/>
           </a:p>
           <a:p>
             <a:pPr algn="ctr" indent="0" marL="0">
               <a:buNone/>
             </a:pPr>
             <a:r>
-              <a:rPr lang="en-US" sz="1200" b="1" dirty="0">
+              <a:rPr lang="en-US" sz="900" b="1" dirty="0">
                 <a:solidFill>
                   <a:srgbClr val="000000"/>
                 </a:solidFill>
               </a:rPr>
               <a:t>Руководитель: Болилая Александра Сергеевна</a:t>
             </a:r>
-            <a:endParaRPr lang="en-US" sz="1200" dirty="0"/>
+            <a:endParaRPr lang="en-US" sz="900" dirty="0"/>
           </a:p>
         </p:txBody>
       </p:sp>
@@ -964,8 +964,8 @@
         </p:nvSpPr>
         <p:spPr>
           <a:xfrm>
-            <a:off x="3931920" y="1737360"/>
-            <a:ext cx="3200400" cy="640080"/>
+            <a:off x="2926080" y="1463040"/>
+            <a:ext cx="2286000" cy="457200"/>
           </a:xfrm>
           <a:prstGeom prst="rect">
             <a:avLst/>
@@ -983,30 +983,53 @@
               <a:buNone/>
             </a:pPr>
             <a:r>
-              <a:rPr lang="en-US" sz="1200" b="1" dirty="0">
+              <a:rPr lang="en-US" sz="900" b="1" dirty="0">
                 <a:solidFill>
                   <a:srgbClr val="000000"/>
                 </a:solidFill>
               </a:rPr>
-              <a:t>Отдел ценных бумаг и аналитики</a:t>
+              <a:t>Отдел ценных бумаг и аналитики (5)</a:t>
             </a:r>
-            <a:endParaRPr lang="en-US" sz="1200" dirty="0"/>
+            <a:endParaRPr lang="en-US" sz="900" dirty="0"/>
           </a:p>
           <a:p>
             <a:pPr algn="ctr" indent="0" marL="0">
               <a:buNone/>
             </a:pPr>
             <a:r>
-              <a:rPr lang="en-US" sz="1200" b="1" dirty="0">
+              <a:rPr lang="en-US" sz="900" b="1" dirty="0">
                 <a:solidFill>
                   <a:srgbClr val="000000"/>
                 </a:solidFill>
               </a:rPr>
               <a:t>Руководитель: Соколова Эльвира Сергеевна</a:t>
             </a:r>
-            <a:endParaRPr lang="en-US" sz="1200" dirty="0"/>
+            <a:endParaRPr lang="en-US" sz="900" dirty="0"/>
           </a:p>
         </p:txBody>
+      </p:sp>
+      <p:sp>
+        <p:nvSpPr>
+          <p:cNvPr id="5" name="Shape 3"/>
+          <p:cNvSpPr/>
+          <p:nvPr/>
+        </p:nvSpPr>
+        <p:spPr>
+          <a:xfrm>
+            <a:off x="1600200" y="1371600"/>
+            <a:ext cx="2468880" cy="91440"/>
+          </a:xfrm>
+          <a:prstGeom prst="line">
+            <a:avLst/>
+          </a:prstGeom>
+          <a:noFill/>
+          <a:ln w="12700">
+            <a:solidFill>
+              <a:srgbClr val="000000"/>
+            </a:solidFill>
+            <a:prstDash val="solid"/>
+          </a:ln>
+        </p:spPr>
       </p:sp>
     </p:spTree>
   </p:cSld>
